--- a/output/wordlabs-agree-3day.pptx
+++ b/output/wordlabs-agree-3day.pptx
@@ -6040,7 +6040,7 @@
                 <a:ea typeface="Calibri" pitchFamily="34" charset="-122"/>
                 <a:cs typeface="Calibri" pitchFamily="34" charset="-120"/>
               </a:rPr>
-              <a:t>We finally reached an </a:t>
+              <a:t>They finally reached an </a:t>
             </a:r>
             <a:pPr algn="l" indent="0" marL="0">
               <a:buNone/>
@@ -6071,7 +6071,7 @@
                 <a:ea typeface="Calibri" pitchFamily="34" charset="-122"/>
                 <a:cs typeface="Calibri" pitchFamily="34" charset="-120"/>
               </a:rPr>
-              <a:t>, but Sam continued to </a:t>
+              <a:t>, even though it was difficult to </a:t>
             </a:r>
             <a:pPr algn="l" indent="0" marL="0">
               <a:buNone/>
@@ -6102,7 +6102,7 @@
                 <a:ea typeface="Calibri" pitchFamily="34" charset="-122"/>
                 <a:cs typeface="Calibri" pitchFamily="34" charset="-120"/>
               </a:rPr>
-              <a:t> with the plan.</a:t>
+              <a:t> politely at first.</a:t>
             </a:r>
             <a:endParaRPr lang="en-US" sz="1800" dirty="0"/>
           </a:p>
@@ -7972,7 +7972,7 @@
                 <a:ea typeface="Calibri" pitchFamily="34" charset="-122"/>
                 <a:cs typeface="Calibri" pitchFamily="34" charset="-120"/>
               </a:rPr>
-              <a:t>state or result of</a:t>
+              <a:t>result or state of</a:t>
             </a:r>
             <a:endParaRPr lang="en-US" sz="850" dirty="0"/>
           </a:p>
@@ -8957,7 +8957,7 @@
                 <a:ea typeface="Calibri" pitchFamily="34" charset="-122"/>
                 <a:cs typeface="Calibri" pitchFamily="34" charset="-120"/>
               </a:rPr>
-              <a:t>state or result of</a:t>
+              <a:t>result or state of</a:t>
             </a:r>
             <a:endParaRPr lang="en-US" sz="850" dirty="0"/>
           </a:p>
@@ -10179,7 +10179,7 @@
                 <a:ea typeface="Calibri" pitchFamily="34" charset="-122"/>
                 <a:cs typeface="Calibri" pitchFamily="34" charset="-120"/>
               </a:rPr>
-              <a:t>state or result of</a:t>
+              <a:t>result or state of</a:t>
             </a:r>
             <a:endParaRPr lang="en-US" sz="850" dirty="0"/>
           </a:p>
@@ -17021,7 +17021,7 @@
                 <a:ea typeface="Trebuchet MS" pitchFamily="34" charset="-122"/>
                 <a:cs typeface="Trebuchet MS" pitchFamily="34" charset="-120"/>
               </a:rPr>
-              <a:t>2</a:t>
+              <a:t>1</a:t>
             </a:r>
             <a:pPr algn="ctr" indent="0" marL="0">
               <a:buNone/>
@@ -17035,7 +17035,7 @@
                 <a:ea typeface="Trebuchet MS" pitchFamily="34" charset="-122"/>
                 <a:cs typeface="Trebuchet MS" pitchFamily="34" charset="-120"/>
               </a:rPr>
-              <a:t>  punctuation marks</a:t>
+              <a:t>  punctuation mark</a:t>
             </a:r>
             <a:endParaRPr lang="en-US" sz="2800" dirty="0"/>
           </a:p>
@@ -17439,7 +17439,7 @@
                 <a:ea typeface="Calibri" pitchFamily="34" charset="-122"/>
                 <a:cs typeface="Calibri" pitchFamily="34" charset="-120"/>
               </a:rPr>
-              <a:t>It was </a:t>
+              <a:t>Although they were </a:t>
             </a:r>
             <a:pPr algn="l" indent="0" marL="0">
               <a:buNone/>
@@ -17456,7 +17456,7 @@
                 <a:ea typeface="Calibri" pitchFamily="34" charset="-122"/>
                 <a:cs typeface="Calibri" pitchFamily="34" charset="-120"/>
               </a:rPr>
-              <a:t>agreeably</a:t>
+              <a:t>disagreeing</a:t>
             </a:r>
             <a:pPr algn="l" indent="0" marL="0">
               <a:buNone/>
@@ -17470,7 +17470,7 @@
                 <a:ea typeface="Calibri" pitchFamily="34" charset="-122"/>
                 <a:cs typeface="Calibri" pitchFamily="34" charset="-120"/>
               </a:rPr>
-              <a:t> surprising that, despite their </a:t>
+              <a:t> about the plan, their </a:t>
             </a:r>
             <a:pPr algn="l" indent="0" marL="0">
               <a:buNone/>
@@ -17487,7 +17487,7 @@
                 <a:ea typeface="Calibri" pitchFamily="34" charset="-122"/>
                 <a:cs typeface="Calibri" pitchFamily="34" charset="-120"/>
               </a:rPr>
-              <a:t>disagreement</a:t>
+              <a:t>agreeableness</a:t>
             </a:r>
             <a:pPr algn="l" indent="0" marL="0">
               <a:buNone/>
@@ -17501,7 +17501,7 @@
                 <a:ea typeface="Calibri" pitchFamily="34" charset="-122"/>
                 <a:cs typeface="Calibri" pitchFamily="34" charset="-120"/>
               </a:rPr>
-              <a:t>, both teams remained </a:t>
+              <a:t> meant they found a solution that was </a:t>
             </a:r>
             <a:pPr algn="l" indent="0" marL="0">
               <a:buNone/>
@@ -17518,7 +17518,7 @@
                 <a:ea typeface="Calibri" pitchFamily="34" charset="-122"/>
                 <a:cs typeface="Calibri" pitchFamily="34" charset="-120"/>
               </a:rPr>
-              <a:t>agreeable</a:t>
+              <a:t>agreeably</a:t>
             </a:r>
             <a:pPr algn="l" indent="0" marL="0">
               <a:buNone/>
@@ -17532,7 +17532,7 @@
                 <a:ea typeface="Calibri" pitchFamily="34" charset="-122"/>
                 <a:cs typeface="Calibri" pitchFamily="34" charset="-120"/>
               </a:rPr>
-              <a:t> throughout the debate.</a:t>
+              <a:t> fair for everyone.</a:t>
             </a:r>
             <a:endParaRPr lang="en-US" sz="1800" dirty="0"/>
           </a:p>
@@ -17687,7 +17687,7 @@
                 <a:ea typeface="Trebuchet MS" pitchFamily="34" charset="-122"/>
                 <a:cs typeface="Trebuchet MS" pitchFamily="34" charset="-120"/>
               </a:rPr>
-              <a:t>agreeably</a:t>
+              <a:t>disagreeing</a:t>
             </a:r>
             <a:endParaRPr lang="en-US" sz="1400" dirty="0"/>
           </a:p>
@@ -17815,7 +17815,7 @@
                 <a:ea typeface="Trebuchet MS" pitchFamily="34" charset="-122"/>
                 <a:cs typeface="Trebuchet MS" pitchFamily="34" charset="-120"/>
               </a:rPr>
-              <a:t>disagreement</a:t>
+              <a:t>agreeableness</a:t>
             </a:r>
             <a:endParaRPr lang="en-US" sz="1400" dirty="0"/>
           </a:p>
@@ -17943,7 +17943,7 @@
                 <a:ea typeface="Trebuchet MS" pitchFamily="34" charset="-122"/>
                 <a:cs typeface="Trebuchet MS" pitchFamily="34" charset="-120"/>
               </a:rPr>
-              <a:t>agreeable</a:t>
+              <a:t>agreeably</a:t>
             </a:r>
             <a:endParaRPr lang="en-US" sz="1400" dirty="0"/>
           </a:p>
@@ -18413,7 +18413,7 @@
                 <a:ea typeface="Trebuchet MS" pitchFamily="34" charset="-122"/>
                 <a:cs typeface="Trebuchet MS" pitchFamily="34" charset="-120"/>
               </a:rPr>
-              <a:t>agreeably</a:t>
+              <a:t>disagreeing</a:t>
             </a:r>
             <a:endParaRPr lang="en-US" sz="2800" dirty="0"/>
           </a:p>
@@ -19240,7 +19240,7 @@
                 <a:ea typeface="Trebuchet MS" pitchFamily="34" charset="-122"/>
                 <a:cs typeface="Trebuchet MS" pitchFamily="34" charset="-120"/>
               </a:rPr>
-              <a:t>agreeably</a:t>
+              <a:t>disagreeing</a:t>
             </a:r>
             <a:endParaRPr lang="en-US" sz="2800" dirty="0"/>
           </a:p>
@@ -19329,11 +19329,11 @@
             </a:avLst>
           </a:prstGeom>
           <a:solidFill>
-            <a:srgbClr val="CCFBF1"/>
+            <a:srgbClr val="DDD6FE"/>
           </a:solidFill>
           <a:ln w="19050">
             <a:solidFill>
-              <a:srgbClr val="0D9488"/>
+              <a:srgbClr val="7C3AED"/>
             </a:solidFill>
             <a:prstDash val="solid"/>
           </a:ln>
@@ -19373,13 +19373,13 @@
             <a:r>
               <a:rPr lang="en-US" sz="1300" b="1" dirty="0">
                 <a:solidFill>
-                  <a:srgbClr val="0F766E"/>
+                  <a:srgbClr val="4C1D95"/>
                 </a:solidFill>
                 <a:latin typeface="Trebuchet MS" pitchFamily="34" charset="0"/>
                 <a:ea typeface="Trebuchet MS" pitchFamily="34" charset="-122"/>
                 <a:cs typeface="Trebuchet MS" pitchFamily="34" charset="-120"/>
               </a:rPr>
-              <a:t>agree</a:t>
+              <a:t>dis</a:t>
             </a:r>
             <a:endParaRPr lang="en-US" sz="1300" dirty="0"/>
           </a:p>
@@ -19418,7 +19418,7 @@
                 <a:ea typeface="Calibri" pitchFamily="34" charset="-122"/>
                 <a:cs typeface="Calibri" pitchFamily="34" charset="-120"/>
               </a:rPr>
-              <a:t>to have the same opinion</a:t>
+              <a:t>not or opposite of</a:t>
             </a:r>
             <a:endParaRPr lang="en-US" sz="850" dirty="0"/>
           </a:p>
@@ -19441,11 +19441,11 @@
             </a:avLst>
           </a:prstGeom>
           <a:solidFill>
-            <a:srgbClr val="FCE7F3"/>
+            <a:srgbClr val="CCFBF1"/>
           </a:solidFill>
           <a:ln w="19050">
             <a:solidFill>
-              <a:srgbClr val="DB2777"/>
+              <a:srgbClr val="0D9488"/>
             </a:solidFill>
             <a:prstDash val="solid"/>
           </a:ln>
@@ -19485,13 +19485,13 @@
             <a:r>
               <a:rPr lang="en-US" sz="1300" b="1" dirty="0">
                 <a:solidFill>
-                  <a:srgbClr val="9D174D"/>
+                  <a:srgbClr val="0F766E"/>
                 </a:solidFill>
                 <a:latin typeface="Trebuchet MS" pitchFamily="34" charset="0"/>
                 <a:ea typeface="Trebuchet MS" pitchFamily="34" charset="-122"/>
                 <a:cs typeface="Trebuchet MS" pitchFamily="34" charset="-120"/>
               </a:rPr>
-              <a:t>able</a:t>
+              <a:t>agree</a:t>
             </a:r>
             <a:endParaRPr lang="en-US" sz="1300" dirty="0"/>
           </a:p>
@@ -19530,7 +19530,7 @@
                 <a:ea typeface="Calibri" pitchFamily="34" charset="-122"/>
                 <a:cs typeface="Calibri" pitchFamily="34" charset="-120"/>
               </a:rPr>
-              <a:t>able to be</a:t>
+              <a:t>to have the same opinion</a:t>
             </a:r>
             <a:endParaRPr lang="en-US" sz="850" dirty="0"/>
           </a:p>
@@ -19603,7 +19603,7 @@
                 <a:ea typeface="Trebuchet MS" pitchFamily="34" charset="-122"/>
                 <a:cs typeface="Trebuchet MS" pitchFamily="34" charset="-120"/>
               </a:rPr>
-              <a:t>ly</a:t>
+              <a:t>ing</a:t>
             </a:r>
             <a:endParaRPr lang="en-US" sz="1300" dirty="0"/>
           </a:p>
@@ -19642,7 +19642,7 @@
                 <a:ea typeface="Calibri" pitchFamily="34" charset="-122"/>
                 <a:cs typeface="Calibri" pitchFamily="34" charset="-120"/>
               </a:rPr>
-              <a:t>in a certain way</a:t>
+              <a:t>happening right now</a:t>
             </a:r>
             <a:endParaRPr lang="en-US" sz="850" dirty="0"/>
           </a:p>
@@ -20337,7 +20337,7 @@
                 <a:ea typeface="Trebuchet MS" pitchFamily="34" charset="-122"/>
                 <a:cs typeface="Trebuchet MS" pitchFamily="34" charset="-120"/>
               </a:rPr>
-              <a:t>agreeably</a:t>
+              <a:t>disagreeing</a:t>
             </a:r>
             <a:endParaRPr lang="en-US" sz="2800" dirty="0"/>
           </a:p>
@@ -20426,11 +20426,11 @@
             </a:avLst>
           </a:prstGeom>
           <a:solidFill>
-            <a:srgbClr val="CCFBF1"/>
+            <a:srgbClr val="DDD6FE"/>
           </a:solidFill>
           <a:ln w="19050">
             <a:solidFill>
-              <a:srgbClr val="0D9488"/>
+              <a:srgbClr val="7C3AED"/>
             </a:solidFill>
             <a:prstDash val="solid"/>
           </a:ln>
@@ -20470,13 +20470,13 @@
             <a:r>
               <a:rPr lang="en-US" sz="1300" b="1" dirty="0">
                 <a:solidFill>
-                  <a:srgbClr val="0F766E"/>
+                  <a:srgbClr val="4C1D95"/>
                 </a:solidFill>
                 <a:latin typeface="Trebuchet MS" pitchFamily="34" charset="0"/>
                 <a:ea typeface="Trebuchet MS" pitchFamily="34" charset="-122"/>
                 <a:cs typeface="Trebuchet MS" pitchFamily="34" charset="-120"/>
               </a:rPr>
-              <a:t>agree</a:t>
+              <a:t>dis</a:t>
             </a:r>
             <a:endParaRPr lang="en-US" sz="1300" dirty="0"/>
           </a:p>
@@ -20515,7 +20515,7 @@
                 <a:ea typeface="Calibri" pitchFamily="34" charset="-122"/>
                 <a:cs typeface="Calibri" pitchFamily="34" charset="-120"/>
               </a:rPr>
-              <a:t>to have the same opinion</a:t>
+              <a:t>not or opposite of</a:t>
             </a:r>
             <a:endParaRPr lang="en-US" sz="850" dirty="0"/>
           </a:p>
@@ -20538,11 +20538,11 @@
             </a:avLst>
           </a:prstGeom>
           <a:solidFill>
-            <a:srgbClr val="FCE7F3"/>
+            <a:srgbClr val="CCFBF1"/>
           </a:solidFill>
           <a:ln w="19050">
             <a:solidFill>
-              <a:srgbClr val="DB2777"/>
+              <a:srgbClr val="0D9488"/>
             </a:solidFill>
             <a:prstDash val="solid"/>
           </a:ln>
@@ -20582,13 +20582,13 @@
             <a:r>
               <a:rPr lang="en-US" sz="1300" b="1" dirty="0">
                 <a:solidFill>
-                  <a:srgbClr val="9D174D"/>
+                  <a:srgbClr val="0F766E"/>
                 </a:solidFill>
                 <a:latin typeface="Trebuchet MS" pitchFamily="34" charset="0"/>
                 <a:ea typeface="Trebuchet MS" pitchFamily="34" charset="-122"/>
                 <a:cs typeface="Trebuchet MS" pitchFamily="34" charset="-120"/>
               </a:rPr>
-              <a:t>able</a:t>
+              <a:t>agree</a:t>
             </a:r>
             <a:endParaRPr lang="en-US" sz="1300" dirty="0"/>
           </a:p>
@@ -20627,7 +20627,7 @@
                 <a:ea typeface="Calibri" pitchFamily="34" charset="-122"/>
                 <a:cs typeface="Calibri" pitchFamily="34" charset="-120"/>
               </a:rPr>
-              <a:t>able to be</a:t>
+              <a:t>to have the same opinion</a:t>
             </a:r>
             <a:endParaRPr lang="en-US" sz="850" dirty="0"/>
           </a:p>
@@ -20700,7 +20700,7 @@
                 <a:ea typeface="Trebuchet MS" pitchFamily="34" charset="-122"/>
                 <a:cs typeface="Trebuchet MS" pitchFamily="34" charset="-120"/>
               </a:rPr>
-              <a:t>ly</a:t>
+              <a:t>ing</a:t>
             </a:r>
             <a:endParaRPr lang="en-US" sz="1300" dirty="0"/>
           </a:p>
@@ -20739,7 +20739,7 @@
                 <a:ea typeface="Calibri" pitchFamily="34" charset="-122"/>
                 <a:cs typeface="Calibri" pitchFamily="34" charset="-120"/>
               </a:rPr>
-              <a:t>in a certain way</a:t>
+              <a:t>happening right now</a:t>
             </a:r>
             <a:endParaRPr lang="en-US" sz="850" dirty="0"/>
           </a:p>
@@ -20898,7 +20898,7 @@
                 <a:ea typeface="Trebuchet MS" pitchFamily="34" charset="-122"/>
                 <a:cs typeface="Trebuchet MS" pitchFamily="34" charset="-120"/>
               </a:rPr>
-              <a:t>a</a:t>
+              <a:t>dis</a:t>
             </a:r>
             <a:endParaRPr lang="en-US" sz="1400" dirty="0"/>
           </a:p>
@@ -21003,7 +21003,7 @@
                 <a:ea typeface="Trebuchet MS" pitchFamily="34" charset="-122"/>
                 <a:cs typeface="Trebuchet MS" pitchFamily="34" charset="-120"/>
               </a:rPr>
-              <a:t>gree</a:t>
+              <a:t>a</a:t>
             </a:r>
             <a:endParaRPr lang="en-US" sz="1400" dirty="0"/>
           </a:p>
@@ -21108,7 +21108,7 @@
                 <a:ea typeface="Trebuchet MS" pitchFamily="34" charset="-122"/>
                 <a:cs typeface="Trebuchet MS" pitchFamily="34" charset="-120"/>
               </a:rPr>
-              <a:t>ab</a:t>
+              <a:t>gree</a:t>
             </a:r>
             <a:endParaRPr lang="en-US" sz="1400" dirty="0"/>
           </a:p>
@@ -21213,7 +21213,7 @@
                 <a:ea typeface="Trebuchet MS" pitchFamily="34" charset="-122"/>
                 <a:cs typeface="Trebuchet MS" pitchFamily="34" charset="-120"/>
               </a:rPr>
-              <a:t>ly</a:t>
+              <a:t>ing</a:t>
             </a:r>
             <a:endParaRPr lang="en-US" sz="1400" dirty="0"/>
           </a:p>
@@ -21776,7 +21776,7 @@
                 <a:ea typeface="Trebuchet MS" pitchFamily="34" charset="-122"/>
                 <a:cs typeface="Trebuchet MS" pitchFamily="34" charset="-120"/>
               </a:rPr>
-              <a:t>agreeably</a:t>
+              <a:t>disagreeing</a:t>
             </a:r>
             <a:endParaRPr lang="en-US" sz="2800" dirty="0"/>
           </a:p>
@@ -21865,11 +21865,11 @@
             </a:avLst>
           </a:prstGeom>
           <a:solidFill>
-            <a:srgbClr val="CCFBF1"/>
+            <a:srgbClr val="DDD6FE"/>
           </a:solidFill>
           <a:ln w="19050">
             <a:solidFill>
-              <a:srgbClr val="0D9488"/>
+              <a:srgbClr val="7C3AED"/>
             </a:solidFill>
             <a:prstDash val="solid"/>
           </a:ln>
@@ -21909,13 +21909,13 @@
             <a:r>
               <a:rPr lang="en-US" sz="1300" b="1" dirty="0">
                 <a:solidFill>
-                  <a:srgbClr val="0F766E"/>
+                  <a:srgbClr val="4C1D95"/>
                 </a:solidFill>
                 <a:latin typeface="Trebuchet MS" pitchFamily="34" charset="0"/>
                 <a:ea typeface="Trebuchet MS" pitchFamily="34" charset="-122"/>
                 <a:cs typeface="Trebuchet MS" pitchFamily="34" charset="-120"/>
               </a:rPr>
-              <a:t>agree</a:t>
+              <a:t>dis</a:t>
             </a:r>
             <a:endParaRPr lang="en-US" sz="1300" dirty="0"/>
           </a:p>
@@ -21954,7 +21954,7 @@
                 <a:ea typeface="Calibri" pitchFamily="34" charset="-122"/>
                 <a:cs typeface="Calibri" pitchFamily="34" charset="-120"/>
               </a:rPr>
-              <a:t>to have the same opinion</a:t>
+              <a:t>not or opposite of</a:t>
             </a:r>
             <a:endParaRPr lang="en-US" sz="850" dirty="0"/>
           </a:p>
@@ -21977,11 +21977,11 @@
             </a:avLst>
           </a:prstGeom>
           <a:solidFill>
-            <a:srgbClr val="FCE7F3"/>
+            <a:srgbClr val="CCFBF1"/>
           </a:solidFill>
           <a:ln w="19050">
             <a:solidFill>
-              <a:srgbClr val="DB2777"/>
+              <a:srgbClr val="0D9488"/>
             </a:solidFill>
             <a:prstDash val="solid"/>
           </a:ln>
@@ -22021,13 +22021,13 @@
             <a:r>
               <a:rPr lang="en-US" sz="1300" b="1" dirty="0">
                 <a:solidFill>
-                  <a:srgbClr val="9D174D"/>
+                  <a:srgbClr val="0F766E"/>
                 </a:solidFill>
                 <a:latin typeface="Trebuchet MS" pitchFamily="34" charset="0"/>
                 <a:ea typeface="Trebuchet MS" pitchFamily="34" charset="-122"/>
                 <a:cs typeface="Trebuchet MS" pitchFamily="34" charset="-120"/>
               </a:rPr>
-              <a:t>able</a:t>
+              <a:t>agree</a:t>
             </a:r>
             <a:endParaRPr lang="en-US" sz="1300" dirty="0"/>
           </a:p>
@@ -22066,7 +22066,7 @@
                 <a:ea typeface="Calibri" pitchFamily="34" charset="-122"/>
                 <a:cs typeface="Calibri" pitchFamily="34" charset="-120"/>
               </a:rPr>
-              <a:t>able to be</a:t>
+              <a:t>to have the same opinion</a:t>
             </a:r>
             <a:endParaRPr lang="en-US" sz="850" dirty="0"/>
           </a:p>
@@ -22139,7 +22139,7 @@
                 <a:ea typeface="Trebuchet MS" pitchFamily="34" charset="-122"/>
                 <a:cs typeface="Trebuchet MS" pitchFamily="34" charset="-120"/>
               </a:rPr>
-              <a:t>ly</a:t>
+              <a:t>ing</a:t>
             </a:r>
             <a:endParaRPr lang="en-US" sz="1300" dirty="0"/>
           </a:p>
@@ -22178,7 +22178,7 @@
                 <a:ea typeface="Calibri" pitchFamily="34" charset="-122"/>
                 <a:cs typeface="Calibri" pitchFamily="34" charset="-120"/>
               </a:rPr>
-              <a:t>in a certain way</a:t>
+              <a:t>happening right now</a:t>
             </a:r>
             <a:endParaRPr lang="en-US" sz="850" dirty="0"/>
           </a:p>
@@ -22337,7 +22337,7 @@
                 <a:ea typeface="Trebuchet MS" pitchFamily="34" charset="-122"/>
                 <a:cs typeface="Trebuchet MS" pitchFamily="34" charset="-120"/>
               </a:rPr>
-              <a:t>a</a:t>
+              <a:t>dis</a:t>
             </a:r>
             <a:endParaRPr lang="en-US" sz="1400" dirty="0"/>
           </a:p>
@@ -22442,7 +22442,7 @@
                 <a:ea typeface="Trebuchet MS" pitchFamily="34" charset="-122"/>
                 <a:cs typeface="Trebuchet MS" pitchFamily="34" charset="-120"/>
               </a:rPr>
-              <a:t>gree</a:t>
+              <a:t>a</a:t>
             </a:r>
             <a:endParaRPr lang="en-US" sz="1400" dirty="0"/>
           </a:p>
@@ -22547,7 +22547,7 @@
                 <a:ea typeface="Trebuchet MS" pitchFamily="34" charset="-122"/>
                 <a:cs typeface="Trebuchet MS" pitchFamily="34" charset="-120"/>
               </a:rPr>
-              <a:t>ab</a:t>
+              <a:t>gree</a:t>
             </a:r>
             <a:endParaRPr lang="en-US" sz="1400" dirty="0"/>
           </a:p>
@@ -22652,7 +22652,7 @@
                 <a:ea typeface="Trebuchet MS" pitchFamily="34" charset="-122"/>
                 <a:cs typeface="Trebuchet MS" pitchFamily="34" charset="-120"/>
               </a:rPr>
-              <a:t>ly</a:t>
+              <a:t>ing</a:t>
             </a:r>
             <a:endParaRPr lang="en-US" sz="1400" dirty="0"/>
           </a:p>
@@ -22759,8 +22759,8 @@
         </p:nvSpPr>
         <p:spPr>
           <a:xfrm>
-            <a:off x="2023872" y="4169664"/>
-            <a:ext cx="685800" cy="475488"/>
+            <a:off x="1951330" y="4169664"/>
+            <a:ext cx="676656" cy="475488"/>
           </a:xfrm>
           <a:prstGeom prst="rect">
             <a:avLst>
@@ -22786,8 +22786,8 @@
         </p:nvSpPr>
         <p:spPr>
           <a:xfrm>
-            <a:off x="2023872" y="4169664"/>
-            <a:ext cx="685800" cy="475488"/>
+            <a:off x="1951330" y="4169664"/>
+            <a:ext cx="676656" cy="475488"/>
           </a:xfrm>
           <a:prstGeom prst="rect">
             <a:avLst/>
@@ -22811,7 +22811,7 @@
                 <a:ea typeface="Trebuchet MS" pitchFamily="34" charset="-122"/>
                 <a:cs typeface="Trebuchet MS" pitchFamily="34" charset="-120"/>
               </a:rPr>
-              <a:t>a</a:t>
+              <a:t>d</a:t>
             </a:r>
             <a:endParaRPr lang="en-US" sz="900" dirty="0"/>
           </a:p>
@@ -22825,8 +22825,8 @@
         </p:nvSpPr>
         <p:spPr>
           <a:xfrm>
-            <a:off x="2831592" y="4169664"/>
-            <a:ext cx="685800" cy="475488"/>
+            <a:off x="2677363" y="4169664"/>
+            <a:ext cx="676656" cy="475488"/>
           </a:xfrm>
           <a:prstGeom prst="rect">
             <a:avLst>
@@ -22852,8 +22852,8 @@
         </p:nvSpPr>
         <p:spPr>
           <a:xfrm>
-            <a:off x="2831592" y="4169664"/>
-            <a:ext cx="685800" cy="475488"/>
+            <a:off x="2677363" y="4169664"/>
+            <a:ext cx="676656" cy="475488"/>
           </a:xfrm>
           <a:prstGeom prst="rect">
             <a:avLst/>
@@ -22877,7 +22877,7 @@
                 <a:ea typeface="Trebuchet MS" pitchFamily="34" charset="-122"/>
                 <a:cs typeface="Trebuchet MS" pitchFamily="34" charset="-120"/>
               </a:rPr>
-              <a:t>g</a:t>
+              <a:t>i</a:t>
             </a:r>
             <a:endParaRPr lang="en-US" sz="900" dirty="0"/>
           </a:p>
@@ -22891,8 +22891,8 @@
         </p:nvSpPr>
         <p:spPr>
           <a:xfrm>
-            <a:off x="3639312" y="4169664"/>
-            <a:ext cx="685800" cy="475488"/>
+            <a:off x="3403397" y="4169664"/>
+            <a:ext cx="676656" cy="475488"/>
           </a:xfrm>
           <a:prstGeom prst="rect">
             <a:avLst>
@@ -22918,8 +22918,8 @@
         </p:nvSpPr>
         <p:spPr>
           <a:xfrm>
-            <a:off x="3639312" y="4169664"/>
-            <a:ext cx="685800" cy="475488"/>
+            <a:off x="3403397" y="4169664"/>
+            <a:ext cx="676656" cy="475488"/>
           </a:xfrm>
           <a:prstGeom prst="rect">
             <a:avLst/>
@@ -22943,7 +22943,7 @@
                 <a:ea typeface="Trebuchet MS" pitchFamily="34" charset="-122"/>
                 <a:cs typeface="Trebuchet MS" pitchFamily="34" charset="-120"/>
               </a:rPr>
-              <a:t>r</a:t>
+              <a:t>s</a:t>
             </a:r>
             <a:endParaRPr lang="en-US" sz="900" dirty="0"/>
           </a:p>
@@ -22957,8 +22957,8 @@
         </p:nvSpPr>
         <p:spPr>
           <a:xfrm>
-            <a:off x="4447032" y="4169664"/>
-            <a:ext cx="685800" cy="475488"/>
+            <a:off x="4129430" y="4169664"/>
+            <a:ext cx="676656" cy="475488"/>
           </a:xfrm>
           <a:prstGeom prst="rect">
             <a:avLst>
@@ -22984,8 +22984,8 @@
         </p:nvSpPr>
         <p:spPr>
           <a:xfrm>
-            <a:off x="4447032" y="4169664"/>
-            <a:ext cx="685800" cy="475488"/>
+            <a:off x="4129430" y="4169664"/>
+            <a:ext cx="676656" cy="475488"/>
           </a:xfrm>
           <a:prstGeom prst="rect">
             <a:avLst/>
@@ -23009,7 +23009,7 @@
                 <a:ea typeface="Trebuchet MS" pitchFamily="34" charset="-122"/>
                 <a:cs typeface="Trebuchet MS" pitchFamily="34" charset="-120"/>
               </a:rPr>
-              <a:t>ee</a:t>
+              <a:t>a</a:t>
             </a:r>
             <a:endParaRPr lang="en-US" sz="900" dirty="0"/>
           </a:p>
@@ -23023,8 +23023,8 @@
         </p:nvSpPr>
         <p:spPr>
           <a:xfrm>
-            <a:off x="5254752" y="4169664"/>
-            <a:ext cx="685800" cy="475488"/>
+            <a:off x="4855464" y="4169664"/>
+            <a:ext cx="676656" cy="475488"/>
           </a:xfrm>
           <a:prstGeom prst="rect">
             <a:avLst>
@@ -23050,8 +23050,8 @@
         </p:nvSpPr>
         <p:spPr>
           <a:xfrm>
-            <a:off x="5254752" y="4169664"/>
-            <a:ext cx="685800" cy="475488"/>
+            <a:off x="4855464" y="4169664"/>
+            <a:ext cx="676656" cy="475488"/>
           </a:xfrm>
           <a:prstGeom prst="rect">
             <a:avLst/>
@@ -23075,7 +23075,7 @@
                 <a:ea typeface="Trebuchet MS" pitchFamily="34" charset="-122"/>
                 <a:cs typeface="Trebuchet MS" pitchFamily="34" charset="-120"/>
               </a:rPr>
-              <a:t>a</a:t>
+              <a:t>g</a:t>
             </a:r>
             <a:endParaRPr lang="en-US" sz="900" dirty="0"/>
           </a:p>
@@ -23089,8 +23089,8 @@
         </p:nvSpPr>
         <p:spPr>
           <a:xfrm>
-            <a:off x="6062472" y="4169664"/>
-            <a:ext cx="685800" cy="475488"/>
+            <a:off x="5581498" y="4169664"/>
+            <a:ext cx="676656" cy="475488"/>
           </a:xfrm>
           <a:prstGeom prst="rect">
             <a:avLst>
@@ -23116,8 +23116,8 @@
         </p:nvSpPr>
         <p:spPr>
           <a:xfrm>
-            <a:off x="6062472" y="4169664"/>
-            <a:ext cx="685800" cy="475488"/>
+            <a:off x="5581498" y="4169664"/>
+            <a:ext cx="676656" cy="475488"/>
           </a:xfrm>
           <a:prstGeom prst="rect">
             <a:avLst/>
@@ -23141,7 +23141,7 @@
                 <a:ea typeface="Trebuchet MS" pitchFamily="34" charset="-122"/>
                 <a:cs typeface="Trebuchet MS" pitchFamily="34" charset="-120"/>
               </a:rPr>
-              <a:t>b</a:t>
+              <a:t>r</a:t>
             </a:r>
             <a:endParaRPr lang="en-US" sz="900" dirty="0"/>
           </a:p>
@@ -23155,8 +23155,8 @@
         </p:nvSpPr>
         <p:spPr>
           <a:xfrm>
-            <a:off x="6870192" y="4169664"/>
-            <a:ext cx="685800" cy="475488"/>
+            <a:off x="6307531" y="4169664"/>
+            <a:ext cx="676656" cy="475488"/>
           </a:xfrm>
           <a:prstGeom prst="rect">
             <a:avLst>
@@ -23182,8 +23182,8 @@
         </p:nvSpPr>
         <p:spPr>
           <a:xfrm>
-            <a:off x="6870192" y="4169664"/>
-            <a:ext cx="685800" cy="475488"/>
+            <a:off x="6307531" y="4169664"/>
+            <a:ext cx="676656" cy="475488"/>
           </a:xfrm>
           <a:prstGeom prst="rect">
             <a:avLst/>
@@ -23207,7 +23207,7 @@
                 <a:ea typeface="Trebuchet MS" pitchFamily="34" charset="-122"/>
                 <a:cs typeface="Trebuchet MS" pitchFamily="34" charset="-120"/>
               </a:rPr>
-              <a:t>l</a:t>
+              <a:t>ee</a:t>
             </a:r>
             <a:endParaRPr lang="en-US" sz="900" dirty="0"/>
           </a:p>
@@ -23221,8 +23221,8 @@
         </p:nvSpPr>
         <p:spPr>
           <a:xfrm>
-            <a:off x="7677912" y="4169664"/>
-            <a:ext cx="685800" cy="475488"/>
+            <a:off x="7033565" y="4169664"/>
+            <a:ext cx="676656" cy="475488"/>
           </a:xfrm>
           <a:prstGeom prst="rect">
             <a:avLst>
@@ -23248,8 +23248,8 @@
         </p:nvSpPr>
         <p:spPr>
           <a:xfrm>
-            <a:off x="7677912" y="4169664"/>
-            <a:ext cx="685800" cy="475488"/>
+            <a:off x="7033565" y="4169664"/>
+            <a:ext cx="676656" cy="475488"/>
           </a:xfrm>
           <a:prstGeom prst="rect">
             <a:avLst/>
@@ -23273,7 +23273,73 @@
                 <a:ea typeface="Trebuchet MS" pitchFamily="34" charset="-122"/>
                 <a:cs typeface="Trebuchet MS" pitchFamily="34" charset="-120"/>
               </a:rPr>
-              <a:t>y</a:t>
+              <a:t>i</a:t>
+            </a:r>
+            <a:endParaRPr lang="en-US" sz="900" dirty="0"/>
+          </a:p>
+        </p:txBody>
+      </p:sp>
+      <p:sp>
+        <p:nvSpPr>
+          <p:cNvPr id="58" name="Shape 56"/>
+          <p:cNvSpPr/>
+          <p:nvPr/>
+        </p:nvSpPr>
+        <p:spPr>
+          <a:xfrm>
+            <a:off x="7759598" y="4169664"/>
+            <a:ext cx="676656" cy="475488"/>
+          </a:xfrm>
+          <a:prstGeom prst="rect">
+            <a:avLst>
+              <a:gd name="adj" fmla="val 7692"/>
+            </a:avLst>
+          </a:prstGeom>
+          <a:solidFill>
+            <a:srgbClr val="FFFFFF"/>
+          </a:solidFill>
+          <a:ln w="12700">
+            <a:solidFill>
+              <a:srgbClr val="DB2777"/>
+            </a:solidFill>
+            <a:prstDash val="solid"/>
+          </a:ln>
+        </p:spPr>
+      </p:sp>
+      <p:sp>
+        <p:nvSpPr>
+          <p:cNvPr id="59" name="Text 57"/>
+          <p:cNvSpPr/>
+          <p:nvPr/>
+        </p:nvSpPr>
+        <p:spPr>
+          <a:xfrm>
+            <a:off x="7759598" y="4169664"/>
+            <a:ext cx="676656" cy="475488"/>
+          </a:xfrm>
+          <a:prstGeom prst="rect">
+            <a:avLst/>
+          </a:prstGeom>
+          <a:noFill/>
+          <a:ln/>
+        </p:spPr>
+        <p:txBody>
+          <a:bodyPr wrap="square" lIns="0" tIns="0" rIns="0" bIns="0" rtlCol="0" anchor="ctr"/>
+          <a:lstStyle/>
+          <a:p>
+            <a:pPr algn="ctr" indent="0" marL="0">
+              <a:buNone/>
+            </a:pPr>
+            <a:r>
+              <a:rPr lang="en-US" sz="900" b="1" dirty="0">
+                <a:solidFill>
+                  <a:srgbClr val="9D174D"/>
+                </a:solidFill>
+                <a:latin typeface="Trebuchet MS" pitchFamily="34" charset="0"/>
+                <a:ea typeface="Trebuchet MS" pitchFamily="34" charset="-122"/>
+                <a:cs typeface="Trebuchet MS" pitchFamily="34" charset="-120"/>
+              </a:rPr>
+              <a:t>ng</a:t>
             </a:r>
             <a:endParaRPr lang="en-US" sz="900" dirty="0"/>
           </a:p>
@@ -23704,7 +23770,7 @@
                 <a:ea typeface="Trebuchet MS" pitchFamily="34" charset="-122"/>
                 <a:cs typeface="Trebuchet MS" pitchFamily="34" charset="-120"/>
               </a:rPr>
-              <a:t>disagreement</a:t>
+              <a:t>agreeableness</a:t>
             </a:r>
             <a:endParaRPr lang="en-US" sz="2800" dirty="0"/>
           </a:p>
@@ -24531,7 +24597,7 @@
                 <a:ea typeface="Trebuchet MS" pitchFamily="34" charset="-122"/>
                 <a:cs typeface="Trebuchet MS" pitchFamily="34" charset="-120"/>
               </a:rPr>
-              <a:t>disagreement</a:t>
+              <a:t>agreeableness</a:t>
             </a:r>
             <a:endParaRPr lang="en-US" sz="2800" dirty="0"/>
           </a:p>
@@ -24620,11 +24686,11 @@
             </a:avLst>
           </a:prstGeom>
           <a:solidFill>
-            <a:srgbClr val="DDD6FE"/>
+            <a:srgbClr val="CCFBF1"/>
           </a:solidFill>
           <a:ln w="19050">
             <a:solidFill>
-              <a:srgbClr val="7C3AED"/>
+              <a:srgbClr val="0D9488"/>
             </a:solidFill>
             <a:prstDash val="solid"/>
           </a:ln>
@@ -24664,13 +24730,13 @@
             <a:r>
               <a:rPr lang="en-US" sz="1300" b="1" dirty="0">
                 <a:solidFill>
-                  <a:srgbClr val="4C1D95"/>
+                  <a:srgbClr val="0F766E"/>
                 </a:solidFill>
                 <a:latin typeface="Trebuchet MS" pitchFamily="34" charset="0"/>
                 <a:ea typeface="Trebuchet MS" pitchFamily="34" charset="-122"/>
                 <a:cs typeface="Trebuchet MS" pitchFamily="34" charset="-120"/>
               </a:rPr>
-              <a:t>dis</a:t>
+              <a:t>agree</a:t>
             </a:r>
             <a:endParaRPr lang="en-US" sz="1300" dirty="0"/>
           </a:p>
@@ -24709,7 +24775,7 @@
                 <a:ea typeface="Calibri" pitchFamily="34" charset="-122"/>
                 <a:cs typeface="Calibri" pitchFamily="34" charset="-120"/>
               </a:rPr>
-              <a:t>not or opposite of</a:t>
+              <a:t>to have the same opinion</a:t>
             </a:r>
             <a:endParaRPr lang="en-US" sz="850" dirty="0"/>
           </a:p>
@@ -24732,11 +24798,11 @@
             </a:avLst>
           </a:prstGeom>
           <a:solidFill>
-            <a:srgbClr val="CCFBF1"/>
+            <a:srgbClr val="FCE7F3"/>
           </a:solidFill>
           <a:ln w="19050">
             <a:solidFill>
-              <a:srgbClr val="0D9488"/>
+              <a:srgbClr val="DB2777"/>
             </a:solidFill>
             <a:prstDash val="solid"/>
           </a:ln>
@@ -24776,13 +24842,13 @@
             <a:r>
               <a:rPr lang="en-US" sz="1300" b="1" dirty="0">
                 <a:solidFill>
-                  <a:srgbClr val="0F766E"/>
+                  <a:srgbClr val="9D174D"/>
                 </a:solidFill>
                 <a:latin typeface="Trebuchet MS" pitchFamily="34" charset="0"/>
                 <a:ea typeface="Trebuchet MS" pitchFamily="34" charset="-122"/>
                 <a:cs typeface="Trebuchet MS" pitchFamily="34" charset="-120"/>
               </a:rPr>
-              <a:t>agree</a:t>
+              <a:t>able</a:t>
             </a:r>
             <a:endParaRPr lang="en-US" sz="1300" dirty="0"/>
           </a:p>
@@ -24821,7 +24887,7 @@
                 <a:ea typeface="Calibri" pitchFamily="34" charset="-122"/>
                 <a:cs typeface="Calibri" pitchFamily="34" charset="-120"/>
               </a:rPr>
-              <a:t>to have the same opinion</a:t>
+              <a:t>able to be</a:t>
             </a:r>
             <a:endParaRPr lang="en-US" sz="850" dirty="0"/>
           </a:p>
@@ -24894,7 +24960,7 @@
                 <a:ea typeface="Trebuchet MS" pitchFamily="34" charset="-122"/>
                 <a:cs typeface="Trebuchet MS" pitchFamily="34" charset="-120"/>
               </a:rPr>
-              <a:t>ment</a:t>
+              <a:t>ness</a:t>
             </a:r>
             <a:endParaRPr lang="en-US" sz="1300" dirty="0"/>
           </a:p>
@@ -24933,7 +24999,7 @@
                 <a:ea typeface="Calibri" pitchFamily="34" charset="-122"/>
                 <a:cs typeface="Calibri" pitchFamily="34" charset="-120"/>
               </a:rPr>
-              <a:t>state or result of</a:t>
+              <a:t>quality or state of</a:t>
             </a:r>
             <a:endParaRPr lang="en-US" sz="850" dirty="0"/>
           </a:p>
@@ -26347,7 +26413,7 @@
                 <a:ea typeface="Trebuchet MS" pitchFamily="34" charset="-122"/>
                 <a:cs typeface="Trebuchet MS" pitchFamily="34" charset="-120"/>
               </a:rPr>
-              <a:t>disagreement</a:t>
+              <a:t>agreeableness</a:t>
             </a:r>
             <a:endParaRPr lang="en-US" sz="2800" dirty="0"/>
           </a:p>
@@ -26436,11 +26502,11 @@
             </a:avLst>
           </a:prstGeom>
           <a:solidFill>
-            <a:srgbClr val="DDD6FE"/>
+            <a:srgbClr val="CCFBF1"/>
           </a:solidFill>
           <a:ln w="19050">
             <a:solidFill>
-              <a:srgbClr val="7C3AED"/>
+              <a:srgbClr val="0D9488"/>
             </a:solidFill>
             <a:prstDash val="solid"/>
           </a:ln>
@@ -26480,13 +26546,13 @@
             <a:r>
               <a:rPr lang="en-US" sz="1300" b="1" dirty="0">
                 <a:solidFill>
-                  <a:srgbClr val="4C1D95"/>
+                  <a:srgbClr val="0F766E"/>
                 </a:solidFill>
                 <a:latin typeface="Trebuchet MS" pitchFamily="34" charset="0"/>
                 <a:ea typeface="Trebuchet MS" pitchFamily="34" charset="-122"/>
                 <a:cs typeface="Trebuchet MS" pitchFamily="34" charset="-120"/>
               </a:rPr>
-              <a:t>dis</a:t>
+              <a:t>agree</a:t>
             </a:r>
             <a:endParaRPr lang="en-US" sz="1300" dirty="0"/>
           </a:p>
@@ -26525,7 +26591,7 @@
                 <a:ea typeface="Calibri" pitchFamily="34" charset="-122"/>
                 <a:cs typeface="Calibri" pitchFamily="34" charset="-120"/>
               </a:rPr>
-              <a:t>not or opposite of</a:t>
+              <a:t>to have the same opinion</a:t>
             </a:r>
             <a:endParaRPr lang="en-US" sz="850" dirty="0"/>
           </a:p>
@@ -26548,11 +26614,11 @@
             </a:avLst>
           </a:prstGeom>
           <a:solidFill>
-            <a:srgbClr val="CCFBF1"/>
+            <a:srgbClr val="FCE7F3"/>
           </a:solidFill>
           <a:ln w="19050">
             <a:solidFill>
-              <a:srgbClr val="0D9488"/>
+              <a:srgbClr val="DB2777"/>
             </a:solidFill>
             <a:prstDash val="solid"/>
           </a:ln>
@@ -26592,13 +26658,13 @@
             <a:r>
               <a:rPr lang="en-US" sz="1300" b="1" dirty="0">
                 <a:solidFill>
-                  <a:srgbClr val="0F766E"/>
+                  <a:srgbClr val="9D174D"/>
                 </a:solidFill>
                 <a:latin typeface="Trebuchet MS" pitchFamily="34" charset="0"/>
                 <a:ea typeface="Trebuchet MS" pitchFamily="34" charset="-122"/>
                 <a:cs typeface="Trebuchet MS" pitchFamily="34" charset="-120"/>
               </a:rPr>
-              <a:t>agree</a:t>
+              <a:t>able</a:t>
             </a:r>
             <a:endParaRPr lang="en-US" sz="1300" dirty="0"/>
           </a:p>
@@ -26637,7 +26703,7 @@
                 <a:ea typeface="Calibri" pitchFamily="34" charset="-122"/>
                 <a:cs typeface="Calibri" pitchFamily="34" charset="-120"/>
               </a:rPr>
-              <a:t>to have the same opinion</a:t>
+              <a:t>able to be</a:t>
             </a:r>
             <a:endParaRPr lang="en-US" sz="850" dirty="0"/>
           </a:p>
@@ -26710,7 +26776,7 @@
                 <a:ea typeface="Trebuchet MS" pitchFamily="34" charset="-122"/>
                 <a:cs typeface="Trebuchet MS" pitchFamily="34" charset="-120"/>
               </a:rPr>
-              <a:t>ment</a:t>
+              <a:t>ness</a:t>
             </a:r>
             <a:endParaRPr lang="en-US" sz="1300" dirty="0"/>
           </a:p>
@@ -26749,7 +26815,7 @@
                 <a:ea typeface="Calibri" pitchFamily="34" charset="-122"/>
                 <a:cs typeface="Calibri" pitchFamily="34" charset="-120"/>
               </a:rPr>
-              <a:t>state or result of</a:t>
+              <a:t>quality or state of</a:t>
             </a:r>
             <a:endParaRPr lang="en-US" sz="850" dirty="0"/>
           </a:p>
@@ -26856,8 +26922,8 @@
         </p:nvSpPr>
         <p:spPr>
           <a:xfrm>
-            <a:off x="1975104" y="3364992"/>
-            <a:ext cx="1554480" cy="475488"/>
+            <a:off x="1978152" y="3364992"/>
+            <a:ext cx="1225296" cy="475488"/>
           </a:xfrm>
           <a:prstGeom prst="rect">
             <a:avLst>
@@ -26883,8 +26949,8 @@
         </p:nvSpPr>
         <p:spPr>
           <a:xfrm>
-            <a:off x="1975104" y="3364992"/>
-            <a:ext cx="1554480" cy="475488"/>
+            <a:off x="1978152" y="3364992"/>
+            <a:ext cx="1225296" cy="475488"/>
           </a:xfrm>
           <a:prstGeom prst="rect">
             <a:avLst/>
@@ -26908,7 +26974,7 @@
                 <a:ea typeface="Trebuchet MS" pitchFamily="34" charset="-122"/>
                 <a:cs typeface="Trebuchet MS" pitchFamily="34" charset="-120"/>
               </a:rPr>
-              <a:t>dis</a:t>
+              <a:t>a</a:t>
             </a:r>
             <a:endParaRPr lang="en-US" sz="1400" dirty="0"/>
           </a:p>
@@ -26922,8 +26988,8 @@
         </p:nvSpPr>
         <p:spPr>
           <a:xfrm>
-            <a:off x="3529584" y="3364992"/>
-            <a:ext cx="73152" cy="475488"/>
+            <a:off x="3203448" y="3364992"/>
+            <a:ext cx="76200" cy="475488"/>
           </a:xfrm>
           <a:prstGeom prst="rect">
             <a:avLst/>
@@ -26961,8 +27027,8 @@
         </p:nvSpPr>
         <p:spPr>
           <a:xfrm>
-            <a:off x="3602736" y="3364992"/>
-            <a:ext cx="1554480" cy="475488"/>
+            <a:off x="3279648" y="3364992"/>
+            <a:ext cx="1225296" cy="475488"/>
           </a:xfrm>
           <a:prstGeom prst="rect">
             <a:avLst>
@@ -26988,8 +27054,8 @@
         </p:nvSpPr>
         <p:spPr>
           <a:xfrm>
-            <a:off x="3602736" y="3364992"/>
-            <a:ext cx="1554480" cy="475488"/>
+            <a:off x="3279648" y="3364992"/>
+            <a:ext cx="1225296" cy="475488"/>
           </a:xfrm>
           <a:prstGeom prst="rect">
             <a:avLst/>
@@ -27013,7 +27079,7 @@
                 <a:ea typeface="Trebuchet MS" pitchFamily="34" charset="-122"/>
                 <a:cs typeface="Trebuchet MS" pitchFamily="34" charset="-120"/>
               </a:rPr>
-              <a:t>a</a:t>
+              <a:t>gree</a:t>
             </a:r>
             <a:endParaRPr lang="en-US" sz="1400" dirty="0"/>
           </a:p>
@@ -27027,8 +27093,8 @@
         </p:nvSpPr>
         <p:spPr>
           <a:xfrm>
-            <a:off x="5157216" y="3364992"/>
-            <a:ext cx="73152" cy="475488"/>
+            <a:off x="4504944" y="3364992"/>
+            <a:ext cx="76200" cy="475488"/>
           </a:xfrm>
           <a:prstGeom prst="rect">
             <a:avLst/>
@@ -27066,8 +27132,8 @@
         </p:nvSpPr>
         <p:spPr>
           <a:xfrm>
-            <a:off x="5230368" y="3364992"/>
-            <a:ext cx="1554480" cy="475488"/>
+            <a:off x="4581144" y="3364992"/>
+            <a:ext cx="1225296" cy="475488"/>
           </a:xfrm>
           <a:prstGeom prst="rect">
             <a:avLst>
@@ -27093,8 +27159,8 @@
         </p:nvSpPr>
         <p:spPr>
           <a:xfrm>
-            <a:off x="5230368" y="3364992"/>
-            <a:ext cx="1554480" cy="475488"/>
+            <a:off x="4581144" y="3364992"/>
+            <a:ext cx="1225296" cy="475488"/>
           </a:xfrm>
           <a:prstGeom prst="rect">
             <a:avLst/>
@@ -27118,7 +27184,7 @@
                 <a:ea typeface="Trebuchet MS" pitchFamily="34" charset="-122"/>
                 <a:cs typeface="Trebuchet MS" pitchFamily="34" charset="-120"/>
               </a:rPr>
-              <a:t>gree</a:t>
+              <a:t>a</a:t>
             </a:r>
             <a:endParaRPr lang="en-US" sz="1400" dirty="0"/>
           </a:p>
@@ -27132,8 +27198,8 @@
         </p:nvSpPr>
         <p:spPr>
           <a:xfrm>
-            <a:off x="6784848" y="3364992"/>
-            <a:ext cx="73152" cy="475488"/>
+            <a:off x="5806440" y="3364992"/>
+            <a:ext cx="76200" cy="475488"/>
           </a:xfrm>
           <a:prstGeom prst="rect">
             <a:avLst/>
@@ -27171,8 +27237,8 @@
         </p:nvSpPr>
         <p:spPr>
           <a:xfrm>
-            <a:off x="6858000" y="3364992"/>
-            <a:ext cx="1554480" cy="475488"/>
+            <a:off x="5882640" y="3364992"/>
+            <a:ext cx="1225296" cy="475488"/>
           </a:xfrm>
           <a:prstGeom prst="rect">
             <a:avLst>
@@ -27198,8 +27264,8 @@
         </p:nvSpPr>
         <p:spPr>
           <a:xfrm>
-            <a:off x="6858000" y="3364992"/>
-            <a:ext cx="1554480" cy="475488"/>
+            <a:off x="5882640" y="3364992"/>
+            <a:ext cx="1225296" cy="475488"/>
           </a:xfrm>
           <a:prstGeom prst="rect">
             <a:avLst/>
@@ -27223,7 +27289,7 @@
                 <a:ea typeface="Trebuchet MS" pitchFamily="34" charset="-122"/>
                 <a:cs typeface="Trebuchet MS" pitchFamily="34" charset="-120"/>
               </a:rPr>
-              <a:t>ment</a:t>
+              <a:t>ble</a:t>
             </a:r>
             <a:endParaRPr lang="en-US" sz="1400" dirty="0"/>
           </a:p>
@@ -27231,7 +27297,112 @@
       </p:sp>
       <p:sp>
         <p:nvSpPr>
-          <p:cNvPr id="39" name="Shape 37"/>
+          <p:cNvPr id="39" name="Text 37"/>
+          <p:cNvSpPr/>
+          <p:nvPr/>
+        </p:nvSpPr>
+        <p:spPr>
+          <a:xfrm>
+            <a:off x="7107936" y="3364992"/>
+            <a:ext cx="76200" cy="475488"/>
+          </a:xfrm>
+          <a:prstGeom prst="rect">
+            <a:avLst/>
+          </a:prstGeom>
+          <a:noFill/>
+          <a:ln/>
+        </p:spPr>
+        <p:txBody>
+          <a:bodyPr wrap="square" lIns="0" tIns="0" rIns="0" bIns="0" rtlCol="0" anchor="ctr"/>
+          <a:lstStyle/>
+          <a:p>
+            <a:pPr algn="ctr" indent="0" marL="0">
+              <a:buNone/>
+            </a:pPr>
+            <a:r>
+              <a:rPr lang="en-US" sz="1600" b="1" dirty="0">
+                <a:solidFill>
+                  <a:srgbClr val="0D9488"/>
+                </a:solidFill>
+                <a:latin typeface="Trebuchet MS" pitchFamily="34" charset="0"/>
+                <a:ea typeface="Trebuchet MS" pitchFamily="34" charset="-122"/>
+                <a:cs typeface="Trebuchet MS" pitchFamily="34" charset="-120"/>
+              </a:rPr>
+              <a:t>·</a:t>
+            </a:r>
+            <a:endParaRPr lang="en-US" sz="1600" dirty="0"/>
+          </a:p>
+        </p:txBody>
+      </p:sp>
+      <p:sp>
+        <p:nvSpPr>
+          <p:cNvPr id="40" name="Shape 38"/>
+          <p:cNvSpPr/>
+          <p:nvPr/>
+        </p:nvSpPr>
+        <p:spPr>
+          <a:xfrm>
+            <a:off x="7184136" y="3364992"/>
+            <a:ext cx="1225296" cy="475488"/>
+          </a:xfrm>
+          <a:prstGeom prst="rect">
+            <a:avLst>
+              <a:gd name="adj" fmla="val 9615"/>
+            </a:avLst>
+          </a:prstGeom>
+          <a:solidFill>
+            <a:srgbClr val="FFFFFF"/>
+          </a:solidFill>
+          <a:ln w="12700">
+            <a:solidFill>
+              <a:srgbClr val="0D9488"/>
+            </a:solidFill>
+            <a:prstDash val="solid"/>
+          </a:ln>
+        </p:spPr>
+      </p:sp>
+      <p:sp>
+        <p:nvSpPr>
+          <p:cNvPr id="41" name="Text 39"/>
+          <p:cNvSpPr/>
+          <p:nvPr/>
+        </p:nvSpPr>
+        <p:spPr>
+          <a:xfrm>
+            <a:off x="7184136" y="3364992"/>
+            <a:ext cx="1225296" cy="475488"/>
+          </a:xfrm>
+          <a:prstGeom prst="rect">
+            <a:avLst/>
+          </a:prstGeom>
+          <a:noFill/>
+          <a:ln/>
+        </p:spPr>
+        <p:txBody>
+          <a:bodyPr wrap="square" lIns="0" tIns="0" rIns="0" bIns="0" rtlCol="0" anchor="ctr"/>
+          <a:lstStyle/>
+          <a:p>
+            <a:pPr algn="ctr" indent="0" marL="0">
+              <a:buNone/>
+            </a:pPr>
+            <a:r>
+              <a:rPr lang="en-US" sz="1400" b="1" dirty="0">
+                <a:solidFill>
+                  <a:srgbClr val="0D9488"/>
+                </a:solidFill>
+                <a:latin typeface="Trebuchet MS" pitchFamily="34" charset="0"/>
+                <a:ea typeface="Trebuchet MS" pitchFamily="34" charset="-122"/>
+                <a:cs typeface="Trebuchet MS" pitchFamily="34" charset="-120"/>
+              </a:rPr>
+              <a:t>ness</a:t>
+            </a:r>
+            <a:endParaRPr lang="en-US" sz="1400" dirty="0"/>
+          </a:p>
+        </p:txBody>
+      </p:sp>
+      <p:sp>
+        <p:nvSpPr>
+          <p:cNvPr id="42" name="Shape 40"/>
           <p:cNvSpPr/>
           <p:nvPr/>
         </p:nvSpPr>
@@ -27258,7 +27429,7 @@
       </p:sp>
       <p:sp>
         <p:nvSpPr>
-          <p:cNvPr id="40" name="Text 38"/>
+          <p:cNvPr id="43" name="Text 41"/>
           <p:cNvSpPr/>
           <p:nvPr/>
         </p:nvSpPr>
@@ -27297,7 +27468,7 @@
       </p:sp>
       <p:sp>
         <p:nvSpPr>
-          <p:cNvPr id="41" name="Shape 39"/>
+          <p:cNvPr id="44" name="Shape 42"/>
           <p:cNvSpPr/>
           <p:nvPr/>
         </p:nvSpPr>
@@ -27324,7 +27495,7 @@
       </p:sp>
       <p:sp>
         <p:nvSpPr>
-          <p:cNvPr id="42" name="Text 40"/>
+          <p:cNvPr id="45" name="Text 43"/>
           <p:cNvSpPr/>
           <p:nvPr/>
         </p:nvSpPr>
@@ -27786,7 +27957,7 @@
                 <a:ea typeface="Trebuchet MS" pitchFamily="34" charset="-122"/>
                 <a:cs typeface="Trebuchet MS" pitchFamily="34" charset="-120"/>
               </a:rPr>
-              <a:t>disagreement</a:t>
+              <a:t>agreeableness</a:t>
             </a:r>
             <a:endParaRPr lang="en-US" sz="2800" dirty="0"/>
           </a:p>
@@ -27875,11 +28046,11 @@
             </a:avLst>
           </a:prstGeom>
           <a:solidFill>
-            <a:srgbClr val="DDD6FE"/>
+            <a:srgbClr val="CCFBF1"/>
           </a:solidFill>
           <a:ln w="19050">
             <a:solidFill>
-              <a:srgbClr val="7C3AED"/>
+              <a:srgbClr val="0D9488"/>
             </a:solidFill>
             <a:prstDash val="solid"/>
           </a:ln>
@@ -27919,13 +28090,13 @@
             <a:r>
               <a:rPr lang="en-US" sz="1300" b="1" dirty="0">
                 <a:solidFill>
-                  <a:srgbClr val="4C1D95"/>
+                  <a:srgbClr val="0F766E"/>
                 </a:solidFill>
                 <a:latin typeface="Trebuchet MS" pitchFamily="34" charset="0"/>
                 <a:ea typeface="Trebuchet MS" pitchFamily="34" charset="-122"/>
                 <a:cs typeface="Trebuchet MS" pitchFamily="34" charset="-120"/>
               </a:rPr>
-              <a:t>dis</a:t>
+              <a:t>agree</a:t>
             </a:r>
             <a:endParaRPr lang="en-US" sz="1300" dirty="0"/>
           </a:p>
@@ -27964,7 +28135,7 @@
                 <a:ea typeface="Calibri" pitchFamily="34" charset="-122"/>
                 <a:cs typeface="Calibri" pitchFamily="34" charset="-120"/>
               </a:rPr>
-              <a:t>not or opposite of</a:t>
+              <a:t>to have the same opinion</a:t>
             </a:r>
             <a:endParaRPr lang="en-US" sz="850" dirty="0"/>
           </a:p>
@@ -27987,11 +28158,11 @@
             </a:avLst>
           </a:prstGeom>
           <a:solidFill>
-            <a:srgbClr val="CCFBF1"/>
+            <a:srgbClr val="FCE7F3"/>
           </a:solidFill>
           <a:ln w="19050">
             <a:solidFill>
-              <a:srgbClr val="0D9488"/>
+              <a:srgbClr val="DB2777"/>
             </a:solidFill>
             <a:prstDash val="solid"/>
           </a:ln>
@@ -28031,13 +28202,13 @@
             <a:r>
               <a:rPr lang="en-US" sz="1300" b="1" dirty="0">
                 <a:solidFill>
-                  <a:srgbClr val="0F766E"/>
+                  <a:srgbClr val="9D174D"/>
                 </a:solidFill>
                 <a:latin typeface="Trebuchet MS" pitchFamily="34" charset="0"/>
                 <a:ea typeface="Trebuchet MS" pitchFamily="34" charset="-122"/>
                 <a:cs typeface="Trebuchet MS" pitchFamily="34" charset="-120"/>
               </a:rPr>
-              <a:t>agree</a:t>
+              <a:t>able</a:t>
             </a:r>
             <a:endParaRPr lang="en-US" sz="1300" dirty="0"/>
           </a:p>
@@ -28076,7 +28247,7 @@
                 <a:ea typeface="Calibri" pitchFamily="34" charset="-122"/>
                 <a:cs typeface="Calibri" pitchFamily="34" charset="-120"/>
               </a:rPr>
-              <a:t>to have the same opinion</a:t>
+              <a:t>able to be</a:t>
             </a:r>
             <a:endParaRPr lang="en-US" sz="850" dirty="0"/>
           </a:p>
@@ -28149,7 +28320,7 @@
                 <a:ea typeface="Trebuchet MS" pitchFamily="34" charset="-122"/>
                 <a:cs typeface="Trebuchet MS" pitchFamily="34" charset="-120"/>
               </a:rPr>
-              <a:t>ment</a:t>
+              <a:t>ness</a:t>
             </a:r>
             <a:endParaRPr lang="en-US" sz="1300" dirty="0"/>
           </a:p>
@@ -28188,7 +28359,7 @@
                 <a:ea typeface="Calibri" pitchFamily="34" charset="-122"/>
                 <a:cs typeface="Calibri" pitchFamily="34" charset="-120"/>
               </a:rPr>
-              <a:t>state or result of</a:t>
+              <a:t>quality or state of</a:t>
             </a:r>
             <a:endParaRPr lang="en-US" sz="850" dirty="0"/>
           </a:p>
@@ -28295,8 +28466,8 @@
         </p:nvSpPr>
         <p:spPr>
           <a:xfrm>
-            <a:off x="1975104" y="3364992"/>
-            <a:ext cx="1554480" cy="475488"/>
+            <a:off x="1978152" y="3364992"/>
+            <a:ext cx="1225296" cy="475488"/>
           </a:xfrm>
           <a:prstGeom prst="rect">
             <a:avLst>
@@ -28322,8 +28493,8 @@
         </p:nvSpPr>
         <p:spPr>
           <a:xfrm>
-            <a:off x="1975104" y="3364992"/>
-            <a:ext cx="1554480" cy="475488"/>
+            <a:off x="1978152" y="3364992"/>
+            <a:ext cx="1225296" cy="475488"/>
           </a:xfrm>
           <a:prstGeom prst="rect">
             <a:avLst/>
@@ -28347,7 +28518,7 @@
                 <a:ea typeface="Trebuchet MS" pitchFamily="34" charset="-122"/>
                 <a:cs typeface="Trebuchet MS" pitchFamily="34" charset="-120"/>
               </a:rPr>
-              <a:t>dis</a:t>
+              <a:t>a</a:t>
             </a:r>
             <a:endParaRPr lang="en-US" sz="1400" dirty="0"/>
           </a:p>
@@ -28361,8 +28532,8 @@
         </p:nvSpPr>
         <p:spPr>
           <a:xfrm>
-            <a:off x="3529584" y="3364992"/>
-            <a:ext cx="73152" cy="475488"/>
+            <a:off x="3203448" y="3364992"/>
+            <a:ext cx="76200" cy="475488"/>
           </a:xfrm>
           <a:prstGeom prst="rect">
             <a:avLst/>
@@ -28400,8 +28571,8 @@
         </p:nvSpPr>
         <p:spPr>
           <a:xfrm>
-            <a:off x="3602736" y="3364992"/>
-            <a:ext cx="1554480" cy="475488"/>
+            <a:off x="3279648" y="3364992"/>
+            <a:ext cx="1225296" cy="475488"/>
           </a:xfrm>
           <a:prstGeom prst="rect">
             <a:avLst>
@@ -28427,8 +28598,8 @@
         </p:nvSpPr>
         <p:spPr>
           <a:xfrm>
-            <a:off x="3602736" y="3364992"/>
-            <a:ext cx="1554480" cy="475488"/>
+            <a:off x="3279648" y="3364992"/>
+            <a:ext cx="1225296" cy="475488"/>
           </a:xfrm>
           <a:prstGeom prst="rect">
             <a:avLst/>
@@ -28452,7 +28623,7 @@
                 <a:ea typeface="Trebuchet MS" pitchFamily="34" charset="-122"/>
                 <a:cs typeface="Trebuchet MS" pitchFamily="34" charset="-120"/>
               </a:rPr>
-              <a:t>a</a:t>
+              <a:t>gree</a:t>
             </a:r>
             <a:endParaRPr lang="en-US" sz="1400" dirty="0"/>
           </a:p>
@@ -28466,8 +28637,8 @@
         </p:nvSpPr>
         <p:spPr>
           <a:xfrm>
-            <a:off x="5157216" y="3364992"/>
-            <a:ext cx="73152" cy="475488"/>
+            <a:off x="4504944" y="3364992"/>
+            <a:ext cx="76200" cy="475488"/>
           </a:xfrm>
           <a:prstGeom prst="rect">
             <a:avLst/>
@@ -28505,8 +28676,8 @@
         </p:nvSpPr>
         <p:spPr>
           <a:xfrm>
-            <a:off x="5230368" y="3364992"/>
-            <a:ext cx="1554480" cy="475488"/>
+            <a:off x="4581144" y="3364992"/>
+            <a:ext cx="1225296" cy="475488"/>
           </a:xfrm>
           <a:prstGeom prst="rect">
             <a:avLst>
@@ -28532,8 +28703,8 @@
         </p:nvSpPr>
         <p:spPr>
           <a:xfrm>
-            <a:off x="5230368" y="3364992"/>
-            <a:ext cx="1554480" cy="475488"/>
+            <a:off x="4581144" y="3364992"/>
+            <a:ext cx="1225296" cy="475488"/>
           </a:xfrm>
           <a:prstGeom prst="rect">
             <a:avLst/>
@@ -28557,7 +28728,7 @@
                 <a:ea typeface="Trebuchet MS" pitchFamily="34" charset="-122"/>
                 <a:cs typeface="Trebuchet MS" pitchFamily="34" charset="-120"/>
               </a:rPr>
-              <a:t>gree</a:t>
+              <a:t>a</a:t>
             </a:r>
             <a:endParaRPr lang="en-US" sz="1400" dirty="0"/>
           </a:p>
@@ -28571,8 +28742,8 @@
         </p:nvSpPr>
         <p:spPr>
           <a:xfrm>
-            <a:off x="6784848" y="3364992"/>
-            <a:ext cx="73152" cy="475488"/>
+            <a:off x="5806440" y="3364992"/>
+            <a:ext cx="76200" cy="475488"/>
           </a:xfrm>
           <a:prstGeom prst="rect">
             <a:avLst/>
@@ -28610,8 +28781,8 @@
         </p:nvSpPr>
         <p:spPr>
           <a:xfrm>
-            <a:off x="6858000" y="3364992"/>
-            <a:ext cx="1554480" cy="475488"/>
+            <a:off x="5882640" y="3364992"/>
+            <a:ext cx="1225296" cy="475488"/>
           </a:xfrm>
           <a:prstGeom prst="rect">
             <a:avLst>
@@ -28637,8 +28808,8 @@
         </p:nvSpPr>
         <p:spPr>
           <a:xfrm>
-            <a:off x="6858000" y="3364992"/>
-            <a:ext cx="1554480" cy="475488"/>
+            <a:off x="5882640" y="3364992"/>
+            <a:ext cx="1225296" cy="475488"/>
           </a:xfrm>
           <a:prstGeom prst="rect">
             <a:avLst/>
@@ -28662,7 +28833,7 @@
                 <a:ea typeface="Trebuchet MS" pitchFamily="34" charset="-122"/>
                 <a:cs typeface="Trebuchet MS" pitchFamily="34" charset="-120"/>
               </a:rPr>
-              <a:t>ment</a:t>
+              <a:t>ble</a:t>
             </a:r>
             <a:endParaRPr lang="en-US" sz="1400" dirty="0"/>
           </a:p>
@@ -28670,7 +28841,112 @@
       </p:sp>
       <p:sp>
         <p:nvSpPr>
-          <p:cNvPr id="39" name="Shape 37"/>
+          <p:cNvPr id="39" name="Text 37"/>
+          <p:cNvSpPr/>
+          <p:nvPr/>
+        </p:nvSpPr>
+        <p:spPr>
+          <a:xfrm>
+            <a:off x="7107936" y="3364992"/>
+            <a:ext cx="76200" cy="475488"/>
+          </a:xfrm>
+          <a:prstGeom prst="rect">
+            <a:avLst/>
+          </a:prstGeom>
+          <a:noFill/>
+          <a:ln/>
+        </p:spPr>
+        <p:txBody>
+          <a:bodyPr wrap="square" lIns="0" tIns="0" rIns="0" bIns="0" rtlCol="0" anchor="ctr"/>
+          <a:lstStyle/>
+          <a:p>
+            <a:pPr algn="ctr" indent="0" marL="0">
+              <a:buNone/>
+            </a:pPr>
+            <a:r>
+              <a:rPr lang="en-US" sz="1600" b="1" dirty="0">
+                <a:solidFill>
+                  <a:srgbClr val="0D9488"/>
+                </a:solidFill>
+                <a:latin typeface="Trebuchet MS" pitchFamily="34" charset="0"/>
+                <a:ea typeface="Trebuchet MS" pitchFamily="34" charset="-122"/>
+                <a:cs typeface="Trebuchet MS" pitchFamily="34" charset="-120"/>
+              </a:rPr>
+              <a:t>·</a:t>
+            </a:r>
+            <a:endParaRPr lang="en-US" sz="1600" dirty="0"/>
+          </a:p>
+        </p:txBody>
+      </p:sp>
+      <p:sp>
+        <p:nvSpPr>
+          <p:cNvPr id="40" name="Shape 38"/>
+          <p:cNvSpPr/>
+          <p:nvPr/>
+        </p:nvSpPr>
+        <p:spPr>
+          <a:xfrm>
+            <a:off x="7184136" y="3364992"/>
+            <a:ext cx="1225296" cy="475488"/>
+          </a:xfrm>
+          <a:prstGeom prst="rect">
+            <a:avLst>
+              <a:gd name="adj" fmla="val 9615"/>
+            </a:avLst>
+          </a:prstGeom>
+          <a:solidFill>
+            <a:srgbClr val="FFFFFF"/>
+          </a:solidFill>
+          <a:ln w="12700">
+            <a:solidFill>
+              <a:srgbClr val="0D9488"/>
+            </a:solidFill>
+            <a:prstDash val="solid"/>
+          </a:ln>
+        </p:spPr>
+      </p:sp>
+      <p:sp>
+        <p:nvSpPr>
+          <p:cNvPr id="41" name="Text 39"/>
+          <p:cNvSpPr/>
+          <p:nvPr/>
+        </p:nvSpPr>
+        <p:spPr>
+          <a:xfrm>
+            <a:off x="7184136" y="3364992"/>
+            <a:ext cx="1225296" cy="475488"/>
+          </a:xfrm>
+          <a:prstGeom prst="rect">
+            <a:avLst/>
+          </a:prstGeom>
+          <a:noFill/>
+          <a:ln/>
+        </p:spPr>
+        <p:txBody>
+          <a:bodyPr wrap="square" lIns="0" tIns="0" rIns="0" bIns="0" rtlCol="0" anchor="ctr"/>
+          <a:lstStyle/>
+          <a:p>
+            <a:pPr algn="ctr" indent="0" marL="0">
+              <a:buNone/>
+            </a:pPr>
+            <a:r>
+              <a:rPr lang="en-US" sz="1400" b="1" dirty="0">
+                <a:solidFill>
+                  <a:srgbClr val="0D9488"/>
+                </a:solidFill>
+                <a:latin typeface="Trebuchet MS" pitchFamily="34" charset="0"/>
+                <a:ea typeface="Trebuchet MS" pitchFamily="34" charset="-122"/>
+                <a:cs typeface="Trebuchet MS" pitchFamily="34" charset="-120"/>
+              </a:rPr>
+              <a:t>ness</a:t>
+            </a:r>
+            <a:endParaRPr lang="en-US" sz="1400" dirty="0"/>
+          </a:p>
+        </p:txBody>
+      </p:sp>
+      <p:sp>
+        <p:nvSpPr>
+          <p:cNvPr id="42" name="Shape 40"/>
           <p:cNvSpPr/>
           <p:nvPr/>
         </p:nvSpPr>
@@ -28697,7 +28973,7 @@
       </p:sp>
       <p:sp>
         <p:nvSpPr>
-          <p:cNvPr id="40" name="Text 38"/>
+          <p:cNvPr id="43" name="Text 41"/>
           <p:cNvSpPr/>
           <p:nvPr/>
         </p:nvSpPr>
@@ -28736,7 +29012,7 @@
       </p:sp>
       <p:sp>
         <p:nvSpPr>
-          <p:cNvPr id="41" name="Shape 39"/>
+          <p:cNvPr id="44" name="Shape 42"/>
           <p:cNvSpPr/>
           <p:nvPr/>
         </p:nvSpPr>
@@ -28763,7 +29039,7 @@
       </p:sp>
       <p:sp>
         <p:nvSpPr>
-          <p:cNvPr id="42" name="Shape 40"/>
+          <p:cNvPr id="45" name="Shape 43"/>
           <p:cNvSpPr/>
           <p:nvPr/>
         </p:nvSpPr>
@@ -28790,7 +29066,7 @@
       </p:sp>
       <p:sp>
         <p:nvSpPr>
-          <p:cNvPr id="43" name="Text 41"/>
+          <p:cNvPr id="46" name="Text 44"/>
           <p:cNvSpPr/>
           <p:nvPr/>
         </p:nvSpPr>
@@ -28821,7 +29097,7 @@
                 <a:ea typeface="Trebuchet MS" pitchFamily="34" charset="-122"/>
                 <a:cs typeface="Trebuchet MS" pitchFamily="34" charset="-120"/>
               </a:rPr>
-              <a:t>d</a:t>
+              <a:t>a</a:t>
             </a:r>
             <a:endParaRPr lang="en-US" sz="900" dirty="0"/>
           </a:p>
@@ -28829,7 +29105,7 @@
       </p:sp>
       <p:sp>
         <p:nvSpPr>
-          <p:cNvPr id="44" name="Shape 42"/>
+          <p:cNvPr id="47" name="Shape 45"/>
           <p:cNvSpPr/>
           <p:nvPr/>
         </p:nvSpPr>
@@ -28856,7 +29132,7 @@
       </p:sp>
       <p:sp>
         <p:nvSpPr>
-          <p:cNvPr id="45" name="Text 43"/>
+          <p:cNvPr id="48" name="Text 46"/>
           <p:cNvSpPr/>
           <p:nvPr/>
         </p:nvSpPr>
@@ -28887,7 +29163,7 @@
                 <a:ea typeface="Trebuchet MS" pitchFamily="34" charset="-122"/>
                 <a:cs typeface="Trebuchet MS" pitchFamily="34" charset="-120"/>
               </a:rPr>
-              <a:t>i</a:t>
+              <a:t>g</a:t>
             </a:r>
             <a:endParaRPr lang="en-US" sz="900" dirty="0"/>
           </a:p>
@@ -28895,7 +29171,7 @@
       </p:sp>
       <p:sp>
         <p:nvSpPr>
-          <p:cNvPr id="46" name="Shape 44"/>
+          <p:cNvPr id="49" name="Shape 47"/>
           <p:cNvSpPr/>
           <p:nvPr/>
         </p:nvSpPr>
@@ -28922,7 +29198,7 @@
       </p:sp>
       <p:sp>
         <p:nvSpPr>
-          <p:cNvPr id="47" name="Text 45"/>
+          <p:cNvPr id="50" name="Text 48"/>
           <p:cNvSpPr/>
           <p:nvPr/>
         </p:nvSpPr>
@@ -28953,7 +29229,7 @@
                 <a:ea typeface="Trebuchet MS" pitchFamily="34" charset="-122"/>
                 <a:cs typeface="Trebuchet MS" pitchFamily="34" charset="-120"/>
               </a:rPr>
-              <a:t>s</a:t>
+              <a:t>r</a:t>
             </a:r>
             <a:endParaRPr lang="en-US" sz="900" dirty="0"/>
           </a:p>
@@ -28961,7 +29237,7 @@
       </p:sp>
       <p:sp>
         <p:nvSpPr>
-          <p:cNvPr id="48" name="Shape 46"/>
+          <p:cNvPr id="51" name="Shape 49"/>
           <p:cNvSpPr/>
           <p:nvPr/>
         </p:nvSpPr>
@@ -28988,7 +29264,7 @@
       </p:sp>
       <p:sp>
         <p:nvSpPr>
-          <p:cNvPr id="49" name="Text 47"/>
+          <p:cNvPr id="52" name="Text 50"/>
           <p:cNvSpPr/>
           <p:nvPr/>
         </p:nvSpPr>
@@ -29019,7 +29295,7 @@
                 <a:ea typeface="Trebuchet MS" pitchFamily="34" charset="-122"/>
                 <a:cs typeface="Trebuchet MS" pitchFamily="34" charset="-120"/>
               </a:rPr>
-              <a:t>a</a:t>
+              <a:t>ee</a:t>
             </a:r>
             <a:endParaRPr lang="en-US" sz="900" dirty="0"/>
           </a:p>
@@ -29027,7 +29303,7 @@
       </p:sp>
       <p:sp>
         <p:nvSpPr>
-          <p:cNvPr id="50" name="Shape 48"/>
+          <p:cNvPr id="53" name="Shape 51"/>
           <p:cNvSpPr/>
           <p:nvPr/>
         </p:nvSpPr>
@@ -29054,7 +29330,7 @@
       </p:sp>
       <p:sp>
         <p:nvSpPr>
-          <p:cNvPr id="51" name="Text 49"/>
+          <p:cNvPr id="54" name="Text 52"/>
           <p:cNvSpPr/>
           <p:nvPr/>
         </p:nvSpPr>
@@ -29085,7 +29361,7 @@
                 <a:ea typeface="Trebuchet MS" pitchFamily="34" charset="-122"/>
                 <a:cs typeface="Trebuchet MS" pitchFamily="34" charset="-120"/>
               </a:rPr>
-              <a:t>g</a:t>
+              <a:t>a</a:t>
             </a:r>
             <a:endParaRPr lang="en-US" sz="900" dirty="0"/>
           </a:p>
@@ -29093,7 +29369,7 @@
       </p:sp>
       <p:sp>
         <p:nvSpPr>
-          <p:cNvPr id="52" name="Shape 50"/>
+          <p:cNvPr id="55" name="Shape 53"/>
           <p:cNvSpPr/>
           <p:nvPr/>
         </p:nvSpPr>
@@ -29120,7 +29396,7 @@
       </p:sp>
       <p:sp>
         <p:nvSpPr>
-          <p:cNvPr id="53" name="Text 51"/>
+          <p:cNvPr id="56" name="Text 54"/>
           <p:cNvSpPr/>
           <p:nvPr/>
         </p:nvSpPr>
@@ -29151,7 +29427,7 @@
                 <a:ea typeface="Trebuchet MS" pitchFamily="34" charset="-122"/>
                 <a:cs typeface="Trebuchet MS" pitchFamily="34" charset="-120"/>
               </a:rPr>
-              <a:t>r</a:t>
+              <a:t>b</a:t>
             </a:r>
             <a:endParaRPr lang="en-US" sz="900" dirty="0"/>
           </a:p>
@@ -29159,7 +29435,7 @@
       </p:sp>
       <p:sp>
         <p:nvSpPr>
-          <p:cNvPr id="54" name="Shape 52"/>
+          <p:cNvPr id="57" name="Shape 55"/>
           <p:cNvSpPr/>
           <p:nvPr/>
         </p:nvSpPr>
@@ -29186,7 +29462,7 @@
       </p:sp>
       <p:sp>
         <p:nvSpPr>
-          <p:cNvPr id="55" name="Text 53"/>
+          <p:cNvPr id="58" name="Text 56"/>
           <p:cNvSpPr/>
           <p:nvPr/>
         </p:nvSpPr>
@@ -29217,7 +29493,7 @@
                 <a:ea typeface="Trebuchet MS" pitchFamily="34" charset="-122"/>
                 <a:cs typeface="Trebuchet MS" pitchFamily="34" charset="-120"/>
               </a:rPr>
-              <a:t>ee</a:t>
+              <a:t>l</a:t>
             </a:r>
             <a:endParaRPr lang="en-US" sz="900" dirty="0"/>
           </a:p>
@@ -29225,7 +29501,7 @@
       </p:sp>
       <p:sp>
         <p:nvSpPr>
-          <p:cNvPr id="56" name="Shape 54"/>
+          <p:cNvPr id="59" name="Shape 57"/>
           <p:cNvSpPr/>
           <p:nvPr/>
         </p:nvSpPr>
@@ -29252,7 +29528,7 @@
       </p:sp>
       <p:sp>
         <p:nvSpPr>
-          <p:cNvPr id="57" name="Text 55"/>
+          <p:cNvPr id="60" name="Text 58"/>
           <p:cNvSpPr/>
           <p:nvPr/>
         </p:nvSpPr>
@@ -29283,7 +29559,7 @@
                 <a:ea typeface="Trebuchet MS" pitchFamily="34" charset="-122"/>
                 <a:cs typeface="Trebuchet MS" pitchFamily="34" charset="-120"/>
               </a:rPr>
-              <a:t>m</a:t>
+              <a:t>e</a:t>
             </a:r>
             <a:endParaRPr lang="en-US" sz="900" dirty="0"/>
           </a:p>
@@ -29291,7 +29567,7 @@
       </p:sp>
       <p:sp>
         <p:nvSpPr>
-          <p:cNvPr id="58" name="Shape 56"/>
+          <p:cNvPr id="61" name="Shape 59"/>
           <p:cNvSpPr/>
           <p:nvPr/>
         </p:nvSpPr>
@@ -29318,7 +29594,7 @@
       </p:sp>
       <p:sp>
         <p:nvSpPr>
-          <p:cNvPr id="59" name="Text 57"/>
+          <p:cNvPr id="62" name="Text 60"/>
           <p:cNvSpPr/>
           <p:nvPr/>
         </p:nvSpPr>
@@ -29349,7 +29625,7 @@
                 <a:ea typeface="Trebuchet MS" pitchFamily="34" charset="-122"/>
                 <a:cs typeface="Trebuchet MS" pitchFamily="34" charset="-120"/>
               </a:rPr>
-              <a:t>e</a:t>
+              <a:t>n</a:t>
             </a:r>
             <a:endParaRPr lang="en-US" sz="900" dirty="0"/>
           </a:p>
@@ -29357,7 +29633,7 @@
       </p:sp>
       <p:sp>
         <p:nvSpPr>
-          <p:cNvPr id="60" name="Shape 58"/>
+          <p:cNvPr id="63" name="Shape 61"/>
           <p:cNvSpPr/>
           <p:nvPr/>
         </p:nvSpPr>
@@ -29384,7 +29660,7 @@
       </p:sp>
       <p:sp>
         <p:nvSpPr>
-          <p:cNvPr id="61" name="Text 59"/>
+          <p:cNvPr id="64" name="Text 62"/>
           <p:cNvSpPr/>
           <p:nvPr/>
         </p:nvSpPr>
@@ -29415,7 +29691,7 @@
                 <a:ea typeface="Trebuchet MS" pitchFamily="34" charset="-122"/>
                 <a:cs typeface="Trebuchet MS" pitchFamily="34" charset="-120"/>
               </a:rPr>
-              <a:t>n</a:t>
+              <a:t>e</a:t>
             </a:r>
             <a:endParaRPr lang="en-US" sz="900" dirty="0"/>
           </a:p>
@@ -29423,7 +29699,7 @@
       </p:sp>
       <p:sp>
         <p:nvSpPr>
-          <p:cNvPr id="62" name="Shape 60"/>
+          <p:cNvPr id="65" name="Shape 63"/>
           <p:cNvSpPr/>
           <p:nvPr/>
         </p:nvSpPr>
@@ -29450,7 +29726,7 @@
       </p:sp>
       <p:sp>
         <p:nvSpPr>
-          <p:cNvPr id="63" name="Text 61"/>
+          <p:cNvPr id="66" name="Text 64"/>
           <p:cNvSpPr/>
           <p:nvPr/>
         </p:nvSpPr>
@@ -29481,7 +29757,7 @@
                 <a:ea typeface="Trebuchet MS" pitchFamily="34" charset="-122"/>
                 <a:cs typeface="Trebuchet MS" pitchFamily="34" charset="-120"/>
               </a:rPr>
-              <a:t>t</a:t>
+              <a:t>ss</a:t>
             </a:r>
             <a:endParaRPr lang="en-US" sz="900" dirty="0"/>
           </a:p>
@@ -29912,7 +30188,7 @@
                 <a:ea typeface="Trebuchet MS" pitchFamily="34" charset="-122"/>
                 <a:cs typeface="Trebuchet MS" pitchFamily="34" charset="-120"/>
               </a:rPr>
-              <a:t>agreeable</a:t>
+              <a:t>agreeably</a:t>
             </a:r>
             <a:endParaRPr lang="en-US" sz="2800" dirty="0"/>
           </a:p>
@@ -30739,7 +31015,7 @@
                 <a:ea typeface="Trebuchet MS" pitchFamily="34" charset="-122"/>
                 <a:cs typeface="Trebuchet MS" pitchFamily="34" charset="-120"/>
               </a:rPr>
-              <a:t>agreeable</a:t>
+              <a:t>agreeably</a:t>
             </a:r>
             <a:endParaRPr lang="en-US" sz="2800" dirty="0"/>
           </a:p>
@@ -30819,7 +31095,7 @@
         </p:nvSpPr>
         <p:spPr>
           <a:xfrm>
-            <a:off x="2938272" y="2258568"/>
+            <a:off x="2221992" y="2258568"/>
             <a:ext cx="1828800" cy="292608"/>
           </a:xfrm>
           <a:prstGeom prst="rect">
@@ -30853,7 +31129,7 @@
         </p:nvSpPr>
         <p:spPr>
           <a:xfrm>
-            <a:off x="2938272" y="2258568"/>
+            <a:off x="2221992" y="2258568"/>
             <a:ext cx="1828800" cy="292608"/>
           </a:xfrm>
           <a:prstGeom prst="rect">
@@ -30892,7 +31168,7 @@
         </p:nvSpPr>
         <p:spPr>
           <a:xfrm>
-            <a:off x="2938272" y="2569464"/>
+            <a:off x="2221992" y="2569464"/>
             <a:ext cx="1828800" cy="201168"/>
           </a:xfrm>
           <a:prstGeom prst="rect">
@@ -30931,7 +31207,7 @@
         </p:nvSpPr>
         <p:spPr>
           <a:xfrm>
-            <a:off x="5803392" y="2258568"/>
+            <a:off x="4370832" y="2258568"/>
             <a:ext cx="1828800" cy="292608"/>
           </a:xfrm>
           <a:prstGeom prst="rect">
@@ -30965,7 +31241,7 @@
         </p:nvSpPr>
         <p:spPr>
           <a:xfrm>
-            <a:off x="5803392" y="2258568"/>
+            <a:off x="4370832" y="2258568"/>
             <a:ext cx="1828800" cy="292608"/>
           </a:xfrm>
           <a:prstGeom prst="rect">
@@ -31004,7 +31280,7 @@
         </p:nvSpPr>
         <p:spPr>
           <a:xfrm>
-            <a:off x="5803392" y="2569464"/>
+            <a:off x="4370832" y="2569464"/>
             <a:ext cx="1828800" cy="201168"/>
           </a:xfrm>
           <a:prstGeom prst="rect">
@@ -31043,6 +31319,118 @@
         </p:nvSpPr>
         <p:spPr>
           <a:xfrm>
+            <a:off x="6519672" y="2258568"/>
+            <a:ext cx="1828800" cy="292608"/>
+          </a:xfrm>
+          <a:prstGeom prst="rect">
+            <a:avLst>
+              <a:gd name="adj" fmla="val 25000"/>
+            </a:avLst>
+          </a:prstGeom>
+          <a:solidFill>
+            <a:srgbClr val="FCE7F3"/>
+          </a:solidFill>
+          <a:ln w="19050">
+            <a:solidFill>
+              <a:srgbClr val="DB2777"/>
+            </a:solidFill>
+            <a:prstDash val="solid"/>
+          </a:ln>
+          <a:effectLst>
+            <a:outerShdw sx="100000" sy="100000" kx="0" ky="0" algn="bl" rotWithShape="0" blurRad="101600" dist="38100" dir="8100000">
+              <a:srgbClr val="000000">
+                <a:alpha val="12000"/>
+              </a:srgbClr>
+            </a:outerShdw>
+          </a:effectLst>
+        </p:spPr>
+      </p:sp>
+      <p:sp>
+        <p:nvSpPr>
+          <p:cNvPr id="23" name="Text 21"/>
+          <p:cNvSpPr/>
+          <p:nvPr/>
+        </p:nvSpPr>
+        <p:spPr>
+          <a:xfrm>
+            <a:off x="6519672" y="2258568"/>
+            <a:ext cx="1828800" cy="292608"/>
+          </a:xfrm>
+          <a:prstGeom prst="rect">
+            <a:avLst/>
+          </a:prstGeom>
+          <a:noFill/>
+          <a:ln/>
+        </p:spPr>
+        <p:txBody>
+          <a:bodyPr wrap="square" lIns="0" tIns="0" rIns="0" bIns="0" rtlCol="0" anchor="ctr"/>
+          <a:lstStyle/>
+          <a:p>
+            <a:pPr algn="ctr" indent="0" marL="0">
+              <a:buNone/>
+            </a:pPr>
+            <a:r>
+              <a:rPr lang="en-US" sz="1300" b="1" dirty="0">
+                <a:solidFill>
+                  <a:srgbClr val="9D174D"/>
+                </a:solidFill>
+                <a:latin typeface="Trebuchet MS" pitchFamily="34" charset="0"/>
+                <a:ea typeface="Trebuchet MS" pitchFamily="34" charset="-122"/>
+                <a:cs typeface="Trebuchet MS" pitchFamily="34" charset="-120"/>
+              </a:rPr>
+              <a:t>y</a:t>
+            </a:r>
+            <a:endParaRPr lang="en-US" sz="1300" dirty="0"/>
+          </a:p>
+        </p:txBody>
+      </p:sp>
+      <p:sp>
+        <p:nvSpPr>
+          <p:cNvPr id="24" name="Text 22"/>
+          <p:cNvSpPr/>
+          <p:nvPr/>
+        </p:nvSpPr>
+        <p:spPr>
+          <a:xfrm>
+            <a:off x="6519672" y="2569464"/>
+            <a:ext cx="1828800" cy="201168"/>
+          </a:xfrm>
+          <a:prstGeom prst="rect">
+            <a:avLst/>
+          </a:prstGeom>
+          <a:noFill/>
+          <a:ln/>
+        </p:spPr>
+        <p:txBody>
+          <a:bodyPr wrap="square" lIns="0" tIns="0" rIns="0" bIns="0" rtlCol="0" anchor="t"/>
+          <a:lstStyle/>
+          <a:p>
+            <a:pPr algn="ctr" indent="0" marL="0">
+              <a:buNone/>
+            </a:pPr>
+            <a:r>
+              <a:rPr lang="en-US" sz="850" dirty="0">
+                <a:solidFill>
+                  <a:srgbClr val="475569"/>
+                </a:solidFill>
+                <a:latin typeface="Calibri" pitchFamily="34" charset="0"/>
+                <a:ea typeface="Calibri" pitchFamily="34" charset="-122"/>
+                <a:cs typeface="Calibri" pitchFamily="34" charset="-120"/>
+              </a:rPr>
+              <a:t>in this way</a:t>
+            </a:r>
+            <a:endParaRPr lang="en-US" sz="850" dirty="0"/>
+          </a:p>
+        </p:txBody>
+      </p:sp>
+      <p:sp>
+        <p:nvSpPr>
+          <p:cNvPr id="25" name="Shape 23"/>
+          <p:cNvSpPr/>
+          <p:nvPr/>
+        </p:nvSpPr>
+        <p:spPr>
+          <a:xfrm>
             <a:off x="365760" y="3273552"/>
             <a:ext cx="1371600" cy="658368"/>
           </a:xfrm>
@@ -31064,7 +31452,7 @@
       </p:sp>
       <p:sp>
         <p:nvSpPr>
-          <p:cNvPr id="23" name="Text 21"/>
+          <p:cNvPr id="26" name="Text 24"/>
           <p:cNvSpPr/>
           <p:nvPr/>
         </p:nvSpPr>
@@ -31103,7 +31491,7 @@
       </p:sp>
       <p:sp>
         <p:nvSpPr>
-          <p:cNvPr id="24" name="Shape 22"/>
+          <p:cNvPr id="27" name="Shape 25"/>
           <p:cNvSpPr/>
           <p:nvPr/>
         </p:nvSpPr>
@@ -31130,7 +31518,7 @@
       </p:sp>
       <p:sp>
         <p:nvSpPr>
-          <p:cNvPr id="25" name="Text 23"/>
+          <p:cNvPr id="28" name="Text 26"/>
           <p:cNvSpPr/>
           <p:nvPr/>
         </p:nvSpPr>
@@ -31169,7 +31557,7 @@
       </p:sp>
       <p:sp>
         <p:nvSpPr>
-          <p:cNvPr id="26" name="Shape 24"/>
+          <p:cNvPr id="29" name="Shape 27"/>
           <p:cNvSpPr/>
           <p:nvPr/>
         </p:nvSpPr>
@@ -31196,7 +31584,7 @@
       </p:sp>
       <p:sp>
         <p:nvSpPr>
-          <p:cNvPr id="27" name="Text 25"/>
+          <p:cNvPr id="30" name="Text 28"/>
           <p:cNvSpPr/>
           <p:nvPr/>
         </p:nvSpPr>
@@ -31235,7 +31623,7 @@
       </p:sp>
       <p:sp>
         <p:nvSpPr>
-          <p:cNvPr id="28" name="Shape 26"/>
+          <p:cNvPr id="31" name="Shape 29"/>
           <p:cNvSpPr/>
           <p:nvPr/>
         </p:nvSpPr>
@@ -31262,7 +31650,7 @@
       </p:sp>
       <p:sp>
         <p:nvSpPr>
-          <p:cNvPr id="29" name="Text 27"/>
+          <p:cNvPr id="32" name="Text 30"/>
           <p:cNvSpPr/>
           <p:nvPr/>
         </p:nvSpPr>
@@ -31724,7 +32112,7 @@
                 <a:ea typeface="Trebuchet MS" pitchFamily="34" charset="-122"/>
                 <a:cs typeface="Trebuchet MS" pitchFamily="34" charset="-120"/>
               </a:rPr>
-              <a:t>agreeable</a:t>
+              <a:t>agreeably</a:t>
             </a:r>
             <a:endParaRPr lang="en-US" sz="2800" dirty="0"/>
           </a:p>
@@ -31804,7 +32192,7 @@
         </p:nvSpPr>
         <p:spPr>
           <a:xfrm>
-            <a:off x="2938272" y="2258568"/>
+            <a:off x="2221992" y="2258568"/>
             <a:ext cx="1828800" cy="292608"/>
           </a:xfrm>
           <a:prstGeom prst="rect">
@@ -31838,7 +32226,7 @@
         </p:nvSpPr>
         <p:spPr>
           <a:xfrm>
-            <a:off x="2938272" y="2258568"/>
+            <a:off x="2221992" y="2258568"/>
             <a:ext cx="1828800" cy="292608"/>
           </a:xfrm>
           <a:prstGeom prst="rect">
@@ -31877,7 +32265,7 @@
         </p:nvSpPr>
         <p:spPr>
           <a:xfrm>
-            <a:off x="2938272" y="2569464"/>
+            <a:off x="2221992" y="2569464"/>
             <a:ext cx="1828800" cy="201168"/>
           </a:xfrm>
           <a:prstGeom prst="rect">
@@ -31916,7 +32304,7 @@
         </p:nvSpPr>
         <p:spPr>
           <a:xfrm>
-            <a:off x="5803392" y="2258568"/>
+            <a:off x="4370832" y="2258568"/>
             <a:ext cx="1828800" cy="292608"/>
           </a:xfrm>
           <a:prstGeom prst="rect">
@@ -31950,7 +32338,7 @@
         </p:nvSpPr>
         <p:spPr>
           <a:xfrm>
-            <a:off x="5803392" y="2258568"/>
+            <a:off x="4370832" y="2258568"/>
             <a:ext cx="1828800" cy="292608"/>
           </a:xfrm>
           <a:prstGeom prst="rect">
@@ -31989,7 +32377,7 @@
         </p:nvSpPr>
         <p:spPr>
           <a:xfrm>
-            <a:off x="5803392" y="2569464"/>
+            <a:off x="4370832" y="2569464"/>
             <a:ext cx="1828800" cy="201168"/>
           </a:xfrm>
           <a:prstGeom prst="rect">
@@ -32028,6 +32416,118 @@
         </p:nvSpPr>
         <p:spPr>
           <a:xfrm>
+            <a:off x="6519672" y="2258568"/>
+            <a:ext cx="1828800" cy="292608"/>
+          </a:xfrm>
+          <a:prstGeom prst="rect">
+            <a:avLst>
+              <a:gd name="adj" fmla="val 25000"/>
+            </a:avLst>
+          </a:prstGeom>
+          <a:solidFill>
+            <a:srgbClr val="FCE7F3"/>
+          </a:solidFill>
+          <a:ln w="19050">
+            <a:solidFill>
+              <a:srgbClr val="DB2777"/>
+            </a:solidFill>
+            <a:prstDash val="solid"/>
+          </a:ln>
+          <a:effectLst>
+            <a:outerShdw sx="100000" sy="100000" kx="0" ky="0" algn="bl" rotWithShape="0" blurRad="101600" dist="38100" dir="8100000">
+              <a:srgbClr val="000000">
+                <a:alpha val="12000"/>
+              </a:srgbClr>
+            </a:outerShdw>
+          </a:effectLst>
+        </p:spPr>
+      </p:sp>
+      <p:sp>
+        <p:nvSpPr>
+          <p:cNvPr id="23" name="Text 21"/>
+          <p:cNvSpPr/>
+          <p:nvPr/>
+        </p:nvSpPr>
+        <p:spPr>
+          <a:xfrm>
+            <a:off x="6519672" y="2258568"/>
+            <a:ext cx="1828800" cy="292608"/>
+          </a:xfrm>
+          <a:prstGeom prst="rect">
+            <a:avLst/>
+          </a:prstGeom>
+          <a:noFill/>
+          <a:ln/>
+        </p:spPr>
+        <p:txBody>
+          <a:bodyPr wrap="square" lIns="0" tIns="0" rIns="0" bIns="0" rtlCol="0" anchor="ctr"/>
+          <a:lstStyle/>
+          <a:p>
+            <a:pPr algn="ctr" indent="0" marL="0">
+              <a:buNone/>
+            </a:pPr>
+            <a:r>
+              <a:rPr lang="en-US" sz="1300" b="1" dirty="0">
+                <a:solidFill>
+                  <a:srgbClr val="9D174D"/>
+                </a:solidFill>
+                <a:latin typeface="Trebuchet MS" pitchFamily="34" charset="0"/>
+                <a:ea typeface="Trebuchet MS" pitchFamily="34" charset="-122"/>
+                <a:cs typeface="Trebuchet MS" pitchFamily="34" charset="-120"/>
+              </a:rPr>
+              <a:t>y</a:t>
+            </a:r>
+            <a:endParaRPr lang="en-US" sz="1300" dirty="0"/>
+          </a:p>
+        </p:txBody>
+      </p:sp>
+      <p:sp>
+        <p:nvSpPr>
+          <p:cNvPr id="24" name="Text 22"/>
+          <p:cNvSpPr/>
+          <p:nvPr/>
+        </p:nvSpPr>
+        <p:spPr>
+          <a:xfrm>
+            <a:off x="6519672" y="2569464"/>
+            <a:ext cx="1828800" cy="201168"/>
+          </a:xfrm>
+          <a:prstGeom prst="rect">
+            <a:avLst/>
+          </a:prstGeom>
+          <a:noFill/>
+          <a:ln/>
+        </p:spPr>
+        <p:txBody>
+          <a:bodyPr wrap="square" lIns="0" tIns="0" rIns="0" bIns="0" rtlCol="0" anchor="t"/>
+          <a:lstStyle/>
+          <a:p>
+            <a:pPr algn="ctr" indent="0" marL="0">
+              <a:buNone/>
+            </a:pPr>
+            <a:r>
+              <a:rPr lang="en-US" sz="850" dirty="0">
+                <a:solidFill>
+                  <a:srgbClr val="475569"/>
+                </a:solidFill>
+                <a:latin typeface="Calibri" pitchFamily="34" charset="0"/>
+                <a:ea typeface="Calibri" pitchFamily="34" charset="-122"/>
+                <a:cs typeface="Calibri" pitchFamily="34" charset="-120"/>
+              </a:rPr>
+              <a:t>in this way</a:t>
+            </a:r>
+            <a:endParaRPr lang="en-US" sz="850" dirty="0"/>
+          </a:p>
+        </p:txBody>
+      </p:sp>
+      <p:sp>
+        <p:nvSpPr>
+          <p:cNvPr id="25" name="Shape 23"/>
+          <p:cNvSpPr/>
+          <p:nvPr/>
+        </p:nvSpPr>
+        <p:spPr>
+          <a:xfrm>
             <a:off x="365760" y="3273552"/>
             <a:ext cx="1371600" cy="658368"/>
           </a:xfrm>
@@ -32049,7 +32549,7 @@
       </p:sp>
       <p:sp>
         <p:nvSpPr>
-          <p:cNvPr id="23" name="Text 21"/>
+          <p:cNvPr id="26" name="Text 24"/>
           <p:cNvSpPr/>
           <p:nvPr/>
         </p:nvSpPr>
@@ -32088,7 +32588,7 @@
       </p:sp>
       <p:sp>
         <p:nvSpPr>
-          <p:cNvPr id="24" name="Shape 22"/>
+          <p:cNvPr id="27" name="Shape 25"/>
           <p:cNvSpPr/>
           <p:nvPr/>
         </p:nvSpPr>
@@ -32115,7 +32615,7 @@
       </p:sp>
       <p:sp>
         <p:nvSpPr>
-          <p:cNvPr id="25" name="Shape 23"/>
+          <p:cNvPr id="28" name="Shape 26"/>
           <p:cNvSpPr/>
           <p:nvPr/>
         </p:nvSpPr>
@@ -32142,7 +32642,7 @@
       </p:sp>
       <p:sp>
         <p:nvSpPr>
-          <p:cNvPr id="26" name="Text 24"/>
+          <p:cNvPr id="29" name="Text 27"/>
           <p:cNvSpPr/>
           <p:nvPr/>
         </p:nvSpPr>
@@ -32181,7 +32681,7 @@
       </p:sp>
       <p:sp>
         <p:nvSpPr>
-          <p:cNvPr id="27" name="Text 25"/>
+          <p:cNvPr id="30" name="Text 28"/>
           <p:cNvSpPr/>
           <p:nvPr/>
         </p:nvSpPr>
@@ -32220,7 +32720,7 @@
       </p:sp>
       <p:sp>
         <p:nvSpPr>
-          <p:cNvPr id="28" name="Shape 26"/>
+          <p:cNvPr id="31" name="Shape 29"/>
           <p:cNvSpPr/>
           <p:nvPr/>
         </p:nvSpPr>
@@ -32247,7 +32747,7 @@
       </p:sp>
       <p:sp>
         <p:nvSpPr>
-          <p:cNvPr id="29" name="Text 27"/>
+          <p:cNvPr id="32" name="Text 30"/>
           <p:cNvSpPr/>
           <p:nvPr/>
         </p:nvSpPr>
@@ -32286,7 +32786,7 @@
       </p:sp>
       <p:sp>
         <p:nvSpPr>
-          <p:cNvPr id="30" name="Text 28"/>
+          <p:cNvPr id="33" name="Text 31"/>
           <p:cNvSpPr/>
           <p:nvPr/>
         </p:nvSpPr>
@@ -32325,7 +32825,7 @@
       </p:sp>
       <p:sp>
         <p:nvSpPr>
-          <p:cNvPr id="31" name="Shape 29"/>
+          <p:cNvPr id="34" name="Shape 32"/>
           <p:cNvSpPr/>
           <p:nvPr/>
         </p:nvSpPr>
@@ -32352,7 +32852,7 @@
       </p:sp>
       <p:sp>
         <p:nvSpPr>
-          <p:cNvPr id="32" name="Text 30"/>
+          <p:cNvPr id="35" name="Text 33"/>
           <p:cNvSpPr/>
           <p:nvPr/>
         </p:nvSpPr>
@@ -32383,7 +32883,7 @@
                 <a:ea typeface="Trebuchet MS" pitchFamily="34" charset="-122"/>
                 <a:cs typeface="Trebuchet MS" pitchFamily="34" charset="-120"/>
               </a:rPr>
-              <a:t>a</a:t>
+              <a:t>ab</a:t>
             </a:r>
             <a:endParaRPr lang="en-US" sz="1400" dirty="0"/>
           </a:p>
@@ -32391,7 +32891,7 @@
       </p:sp>
       <p:sp>
         <p:nvSpPr>
-          <p:cNvPr id="33" name="Text 31"/>
+          <p:cNvPr id="36" name="Text 34"/>
           <p:cNvSpPr/>
           <p:nvPr/>
         </p:nvSpPr>
@@ -32430,7 +32930,7 @@
       </p:sp>
       <p:sp>
         <p:nvSpPr>
-          <p:cNvPr id="34" name="Shape 32"/>
+          <p:cNvPr id="37" name="Shape 35"/>
           <p:cNvSpPr/>
           <p:nvPr/>
         </p:nvSpPr>
@@ -32457,7 +32957,7 @@
       </p:sp>
       <p:sp>
         <p:nvSpPr>
-          <p:cNvPr id="35" name="Text 33"/>
+          <p:cNvPr id="38" name="Text 36"/>
           <p:cNvSpPr/>
           <p:nvPr/>
         </p:nvSpPr>
@@ -32488,7 +32988,7 @@
                 <a:ea typeface="Trebuchet MS" pitchFamily="34" charset="-122"/>
                 <a:cs typeface="Trebuchet MS" pitchFamily="34" charset="-120"/>
               </a:rPr>
-              <a:t>ble</a:t>
+              <a:t>ly</a:t>
             </a:r>
             <a:endParaRPr lang="en-US" sz="1400" dirty="0"/>
           </a:p>
@@ -32496,7 +32996,7 @@
       </p:sp>
       <p:sp>
         <p:nvSpPr>
-          <p:cNvPr id="36" name="Shape 34"/>
+          <p:cNvPr id="39" name="Shape 37"/>
           <p:cNvSpPr/>
           <p:nvPr/>
         </p:nvSpPr>
@@ -32523,7 +33023,7 @@
       </p:sp>
       <p:sp>
         <p:nvSpPr>
-          <p:cNvPr id="37" name="Text 35"/>
+          <p:cNvPr id="40" name="Text 38"/>
           <p:cNvSpPr/>
           <p:nvPr/>
         </p:nvSpPr>
@@ -32562,7 +33062,7 @@
       </p:sp>
       <p:sp>
         <p:nvSpPr>
-          <p:cNvPr id="38" name="Shape 36"/>
+          <p:cNvPr id="41" name="Shape 39"/>
           <p:cNvSpPr/>
           <p:nvPr/>
         </p:nvSpPr>
@@ -32589,7 +33089,7 @@
       </p:sp>
       <p:sp>
         <p:nvSpPr>
-          <p:cNvPr id="39" name="Text 37"/>
+          <p:cNvPr id="42" name="Text 40"/>
           <p:cNvSpPr/>
           <p:nvPr/>
         </p:nvSpPr>
@@ -33051,7 +33551,7 @@
                 <a:ea typeface="Trebuchet MS" pitchFamily="34" charset="-122"/>
                 <a:cs typeface="Trebuchet MS" pitchFamily="34" charset="-120"/>
               </a:rPr>
-              <a:t>agreeable</a:t>
+              <a:t>agreeably</a:t>
             </a:r>
             <a:endParaRPr lang="en-US" sz="2800" dirty="0"/>
           </a:p>
@@ -33131,7 +33631,7 @@
         </p:nvSpPr>
         <p:spPr>
           <a:xfrm>
-            <a:off x="2938272" y="2258568"/>
+            <a:off x="2221992" y="2258568"/>
             <a:ext cx="1828800" cy="292608"/>
           </a:xfrm>
           <a:prstGeom prst="rect">
@@ -33165,7 +33665,7 @@
         </p:nvSpPr>
         <p:spPr>
           <a:xfrm>
-            <a:off x="2938272" y="2258568"/>
+            <a:off x="2221992" y="2258568"/>
             <a:ext cx="1828800" cy="292608"/>
           </a:xfrm>
           <a:prstGeom prst="rect">
@@ -33204,7 +33704,7 @@
         </p:nvSpPr>
         <p:spPr>
           <a:xfrm>
-            <a:off x="2938272" y="2569464"/>
+            <a:off x="2221992" y="2569464"/>
             <a:ext cx="1828800" cy="201168"/>
           </a:xfrm>
           <a:prstGeom prst="rect">
@@ -33243,7 +33743,7 @@
         </p:nvSpPr>
         <p:spPr>
           <a:xfrm>
-            <a:off x="5803392" y="2258568"/>
+            <a:off x="4370832" y="2258568"/>
             <a:ext cx="1828800" cy="292608"/>
           </a:xfrm>
           <a:prstGeom prst="rect">
@@ -33277,7 +33777,7 @@
         </p:nvSpPr>
         <p:spPr>
           <a:xfrm>
-            <a:off x="5803392" y="2258568"/>
+            <a:off x="4370832" y="2258568"/>
             <a:ext cx="1828800" cy="292608"/>
           </a:xfrm>
           <a:prstGeom prst="rect">
@@ -33316,7 +33816,7 @@
         </p:nvSpPr>
         <p:spPr>
           <a:xfrm>
-            <a:off x="5803392" y="2569464"/>
+            <a:off x="4370832" y="2569464"/>
             <a:ext cx="1828800" cy="201168"/>
           </a:xfrm>
           <a:prstGeom prst="rect">
@@ -33355,6 +33855,118 @@
         </p:nvSpPr>
         <p:spPr>
           <a:xfrm>
+            <a:off x="6519672" y="2258568"/>
+            <a:ext cx="1828800" cy="292608"/>
+          </a:xfrm>
+          <a:prstGeom prst="rect">
+            <a:avLst>
+              <a:gd name="adj" fmla="val 25000"/>
+            </a:avLst>
+          </a:prstGeom>
+          <a:solidFill>
+            <a:srgbClr val="FCE7F3"/>
+          </a:solidFill>
+          <a:ln w="19050">
+            <a:solidFill>
+              <a:srgbClr val="DB2777"/>
+            </a:solidFill>
+            <a:prstDash val="solid"/>
+          </a:ln>
+          <a:effectLst>
+            <a:outerShdw sx="100000" sy="100000" kx="0" ky="0" algn="bl" rotWithShape="0" blurRad="101600" dist="38100" dir="8100000">
+              <a:srgbClr val="000000">
+                <a:alpha val="12000"/>
+              </a:srgbClr>
+            </a:outerShdw>
+          </a:effectLst>
+        </p:spPr>
+      </p:sp>
+      <p:sp>
+        <p:nvSpPr>
+          <p:cNvPr id="23" name="Text 21"/>
+          <p:cNvSpPr/>
+          <p:nvPr/>
+        </p:nvSpPr>
+        <p:spPr>
+          <a:xfrm>
+            <a:off x="6519672" y="2258568"/>
+            <a:ext cx="1828800" cy="292608"/>
+          </a:xfrm>
+          <a:prstGeom prst="rect">
+            <a:avLst/>
+          </a:prstGeom>
+          <a:noFill/>
+          <a:ln/>
+        </p:spPr>
+        <p:txBody>
+          <a:bodyPr wrap="square" lIns="0" tIns="0" rIns="0" bIns="0" rtlCol="0" anchor="ctr"/>
+          <a:lstStyle/>
+          <a:p>
+            <a:pPr algn="ctr" indent="0" marL="0">
+              <a:buNone/>
+            </a:pPr>
+            <a:r>
+              <a:rPr lang="en-US" sz="1300" b="1" dirty="0">
+                <a:solidFill>
+                  <a:srgbClr val="9D174D"/>
+                </a:solidFill>
+                <a:latin typeface="Trebuchet MS" pitchFamily="34" charset="0"/>
+                <a:ea typeface="Trebuchet MS" pitchFamily="34" charset="-122"/>
+                <a:cs typeface="Trebuchet MS" pitchFamily="34" charset="-120"/>
+              </a:rPr>
+              <a:t>y</a:t>
+            </a:r>
+            <a:endParaRPr lang="en-US" sz="1300" dirty="0"/>
+          </a:p>
+        </p:txBody>
+      </p:sp>
+      <p:sp>
+        <p:nvSpPr>
+          <p:cNvPr id="24" name="Text 22"/>
+          <p:cNvSpPr/>
+          <p:nvPr/>
+        </p:nvSpPr>
+        <p:spPr>
+          <a:xfrm>
+            <a:off x="6519672" y="2569464"/>
+            <a:ext cx="1828800" cy="201168"/>
+          </a:xfrm>
+          <a:prstGeom prst="rect">
+            <a:avLst/>
+          </a:prstGeom>
+          <a:noFill/>
+          <a:ln/>
+        </p:spPr>
+        <p:txBody>
+          <a:bodyPr wrap="square" lIns="0" tIns="0" rIns="0" bIns="0" rtlCol="0" anchor="t"/>
+          <a:lstStyle/>
+          <a:p>
+            <a:pPr algn="ctr" indent="0" marL="0">
+              <a:buNone/>
+            </a:pPr>
+            <a:r>
+              <a:rPr lang="en-US" sz="850" dirty="0">
+                <a:solidFill>
+                  <a:srgbClr val="475569"/>
+                </a:solidFill>
+                <a:latin typeface="Calibri" pitchFamily="34" charset="0"/>
+                <a:ea typeface="Calibri" pitchFamily="34" charset="-122"/>
+                <a:cs typeface="Calibri" pitchFamily="34" charset="-120"/>
+              </a:rPr>
+              <a:t>in this way</a:t>
+            </a:r>
+            <a:endParaRPr lang="en-US" sz="850" dirty="0"/>
+          </a:p>
+        </p:txBody>
+      </p:sp>
+      <p:sp>
+        <p:nvSpPr>
+          <p:cNvPr id="25" name="Shape 23"/>
+          <p:cNvSpPr/>
+          <p:nvPr/>
+        </p:nvSpPr>
+        <p:spPr>
+          <a:xfrm>
             <a:off x="365760" y="3273552"/>
             <a:ext cx="1371600" cy="658368"/>
           </a:xfrm>
@@ -33376,7 +33988,7 @@
       </p:sp>
       <p:sp>
         <p:nvSpPr>
-          <p:cNvPr id="23" name="Text 21"/>
+          <p:cNvPr id="26" name="Text 24"/>
           <p:cNvSpPr/>
           <p:nvPr/>
         </p:nvSpPr>
@@ -33415,7 +34027,7 @@
       </p:sp>
       <p:sp>
         <p:nvSpPr>
-          <p:cNvPr id="24" name="Shape 22"/>
+          <p:cNvPr id="27" name="Shape 25"/>
           <p:cNvSpPr/>
           <p:nvPr/>
         </p:nvSpPr>
@@ -33442,7 +34054,7 @@
       </p:sp>
       <p:sp>
         <p:nvSpPr>
-          <p:cNvPr id="25" name="Shape 23"/>
+          <p:cNvPr id="28" name="Shape 26"/>
           <p:cNvSpPr/>
           <p:nvPr/>
         </p:nvSpPr>
@@ -33469,7 +34081,7 @@
       </p:sp>
       <p:sp>
         <p:nvSpPr>
-          <p:cNvPr id="26" name="Text 24"/>
+          <p:cNvPr id="29" name="Text 27"/>
           <p:cNvSpPr/>
           <p:nvPr/>
         </p:nvSpPr>
@@ -33508,7 +34120,7 @@
       </p:sp>
       <p:sp>
         <p:nvSpPr>
-          <p:cNvPr id="27" name="Text 25"/>
+          <p:cNvPr id="30" name="Text 28"/>
           <p:cNvSpPr/>
           <p:nvPr/>
         </p:nvSpPr>
@@ -33547,7 +34159,7 @@
       </p:sp>
       <p:sp>
         <p:nvSpPr>
-          <p:cNvPr id="28" name="Shape 26"/>
+          <p:cNvPr id="31" name="Shape 29"/>
           <p:cNvSpPr/>
           <p:nvPr/>
         </p:nvSpPr>
@@ -33574,7 +34186,7 @@
       </p:sp>
       <p:sp>
         <p:nvSpPr>
-          <p:cNvPr id="29" name="Text 27"/>
+          <p:cNvPr id="32" name="Text 30"/>
           <p:cNvSpPr/>
           <p:nvPr/>
         </p:nvSpPr>
@@ -33613,7 +34225,7 @@
       </p:sp>
       <p:sp>
         <p:nvSpPr>
-          <p:cNvPr id="30" name="Text 28"/>
+          <p:cNvPr id="33" name="Text 31"/>
           <p:cNvSpPr/>
           <p:nvPr/>
         </p:nvSpPr>
@@ -33652,7 +34264,7 @@
       </p:sp>
       <p:sp>
         <p:nvSpPr>
-          <p:cNvPr id="31" name="Shape 29"/>
+          <p:cNvPr id="34" name="Shape 32"/>
           <p:cNvSpPr/>
           <p:nvPr/>
         </p:nvSpPr>
@@ -33679,7 +34291,7 @@
       </p:sp>
       <p:sp>
         <p:nvSpPr>
-          <p:cNvPr id="32" name="Text 30"/>
+          <p:cNvPr id="35" name="Text 33"/>
           <p:cNvSpPr/>
           <p:nvPr/>
         </p:nvSpPr>
@@ -33710,7 +34322,7 @@
                 <a:ea typeface="Trebuchet MS" pitchFamily="34" charset="-122"/>
                 <a:cs typeface="Trebuchet MS" pitchFamily="34" charset="-120"/>
               </a:rPr>
-              <a:t>a</a:t>
+              <a:t>ab</a:t>
             </a:r>
             <a:endParaRPr lang="en-US" sz="1400" dirty="0"/>
           </a:p>
@@ -33718,7 +34330,7 @@
       </p:sp>
       <p:sp>
         <p:nvSpPr>
-          <p:cNvPr id="33" name="Text 31"/>
+          <p:cNvPr id="36" name="Text 34"/>
           <p:cNvSpPr/>
           <p:nvPr/>
         </p:nvSpPr>
@@ -33757,7 +34369,7 @@
       </p:sp>
       <p:sp>
         <p:nvSpPr>
-          <p:cNvPr id="34" name="Shape 32"/>
+          <p:cNvPr id="37" name="Shape 35"/>
           <p:cNvSpPr/>
           <p:nvPr/>
         </p:nvSpPr>
@@ -33784,7 +34396,7 @@
       </p:sp>
       <p:sp>
         <p:nvSpPr>
-          <p:cNvPr id="35" name="Text 33"/>
+          <p:cNvPr id="38" name="Text 36"/>
           <p:cNvSpPr/>
           <p:nvPr/>
         </p:nvSpPr>
@@ -33815,7 +34427,7 @@
                 <a:ea typeface="Trebuchet MS" pitchFamily="34" charset="-122"/>
                 <a:cs typeface="Trebuchet MS" pitchFamily="34" charset="-120"/>
               </a:rPr>
-              <a:t>ble</a:t>
+              <a:t>ly</a:t>
             </a:r>
             <a:endParaRPr lang="en-US" sz="1400" dirty="0"/>
           </a:p>
@@ -33823,7 +34435,7 @@
       </p:sp>
       <p:sp>
         <p:nvSpPr>
-          <p:cNvPr id="36" name="Shape 34"/>
+          <p:cNvPr id="39" name="Shape 37"/>
           <p:cNvSpPr/>
           <p:nvPr/>
         </p:nvSpPr>
@@ -33850,7 +34462,7 @@
       </p:sp>
       <p:sp>
         <p:nvSpPr>
-          <p:cNvPr id="37" name="Text 35"/>
+          <p:cNvPr id="40" name="Text 38"/>
           <p:cNvSpPr/>
           <p:nvPr/>
         </p:nvSpPr>
@@ -33889,7 +34501,7 @@
       </p:sp>
       <p:sp>
         <p:nvSpPr>
-          <p:cNvPr id="38" name="Shape 36"/>
+          <p:cNvPr id="41" name="Shape 39"/>
           <p:cNvSpPr/>
           <p:nvPr/>
         </p:nvSpPr>
@@ -33916,13 +34528,13 @@
       </p:sp>
       <p:sp>
         <p:nvSpPr>
-          <p:cNvPr id="39" name="Shape 37"/>
-          <p:cNvSpPr/>
-          <p:nvPr/>
-        </p:nvSpPr>
-        <p:spPr>
-          <a:xfrm>
-            <a:off x="2124837" y="4169664"/>
+          <p:cNvPr id="42" name="Shape 40"/>
+          <p:cNvSpPr/>
+          <p:nvPr/>
+        </p:nvSpPr>
+        <p:spPr>
+          <a:xfrm>
+            <a:off x="2023872" y="4169664"/>
             <a:ext cx="685800" cy="475488"/>
           </a:xfrm>
           <a:prstGeom prst="rect">
@@ -33943,13 +34555,13 @@
       </p:sp>
       <p:sp>
         <p:nvSpPr>
-          <p:cNvPr id="40" name="Text 38"/>
-          <p:cNvSpPr/>
-          <p:nvPr/>
-        </p:nvSpPr>
-        <p:spPr>
-          <a:xfrm>
-            <a:off x="2124837" y="4169664"/>
+          <p:cNvPr id="43" name="Text 41"/>
+          <p:cNvSpPr/>
+          <p:nvPr/>
+        </p:nvSpPr>
+        <p:spPr>
+          <a:xfrm>
+            <a:off x="2023872" y="4169664"/>
             <a:ext cx="685800" cy="475488"/>
           </a:xfrm>
           <a:prstGeom prst="rect">
@@ -33982,13 +34594,13 @@
       </p:sp>
       <p:sp>
         <p:nvSpPr>
-          <p:cNvPr id="41" name="Shape 39"/>
-          <p:cNvSpPr/>
-          <p:nvPr/>
-        </p:nvSpPr>
-        <p:spPr>
-          <a:xfrm>
-            <a:off x="3033522" y="4169664"/>
+          <p:cNvPr id="44" name="Shape 42"/>
+          <p:cNvSpPr/>
+          <p:nvPr/>
+        </p:nvSpPr>
+        <p:spPr>
+          <a:xfrm>
+            <a:off x="2831592" y="4169664"/>
             <a:ext cx="685800" cy="475488"/>
           </a:xfrm>
           <a:prstGeom prst="rect">
@@ -34009,13 +34621,13 @@
       </p:sp>
       <p:sp>
         <p:nvSpPr>
-          <p:cNvPr id="42" name="Text 40"/>
-          <p:cNvSpPr/>
-          <p:nvPr/>
-        </p:nvSpPr>
-        <p:spPr>
-          <a:xfrm>
-            <a:off x="3033522" y="4169664"/>
+          <p:cNvPr id="45" name="Text 43"/>
+          <p:cNvSpPr/>
+          <p:nvPr/>
+        </p:nvSpPr>
+        <p:spPr>
+          <a:xfrm>
+            <a:off x="2831592" y="4169664"/>
             <a:ext cx="685800" cy="475488"/>
           </a:xfrm>
           <a:prstGeom prst="rect">
@@ -34048,13 +34660,13 @@
       </p:sp>
       <p:sp>
         <p:nvSpPr>
-          <p:cNvPr id="43" name="Shape 41"/>
-          <p:cNvSpPr/>
-          <p:nvPr/>
-        </p:nvSpPr>
-        <p:spPr>
-          <a:xfrm>
-            <a:off x="3942207" y="4169664"/>
+          <p:cNvPr id="46" name="Shape 44"/>
+          <p:cNvSpPr/>
+          <p:nvPr/>
+        </p:nvSpPr>
+        <p:spPr>
+          <a:xfrm>
+            <a:off x="3639312" y="4169664"/>
             <a:ext cx="685800" cy="475488"/>
           </a:xfrm>
           <a:prstGeom prst="rect">
@@ -34075,13 +34687,13 @@
       </p:sp>
       <p:sp>
         <p:nvSpPr>
-          <p:cNvPr id="44" name="Text 42"/>
-          <p:cNvSpPr/>
-          <p:nvPr/>
-        </p:nvSpPr>
-        <p:spPr>
-          <a:xfrm>
-            <a:off x="3942207" y="4169664"/>
+          <p:cNvPr id="47" name="Text 45"/>
+          <p:cNvSpPr/>
+          <p:nvPr/>
+        </p:nvSpPr>
+        <p:spPr>
+          <a:xfrm>
+            <a:off x="3639312" y="4169664"/>
             <a:ext cx="685800" cy="475488"/>
           </a:xfrm>
           <a:prstGeom prst="rect">
@@ -34114,13 +34726,13 @@
       </p:sp>
       <p:sp>
         <p:nvSpPr>
-          <p:cNvPr id="45" name="Shape 43"/>
-          <p:cNvSpPr/>
-          <p:nvPr/>
-        </p:nvSpPr>
-        <p:spPr>
-          <a:xfrm>
-            <a:off x="4850892" y="4169664"/>
+          <p:cNvPr id="48" name="Shape 46"/>
+          <p:cNvSpPr/>
+          <p:nvPr/>
+        </p:nvSpPr>
+        <p:spPr>
+          <a:xfrm>
+            <a:off x="4447032" y="4169664"/>
             <a:ext cx="685800" cy="475488"/>
           </a:xfrm>
           <a:prstGeom prst="rect">
@@ -34141,13 +34753,13 @@
       </p:sp>
       <p:sp>
         <p:nvSpPr>
-          <p:cNvPr id="46" name="Text 44"/>
-          <p:cNvSpPr/>
-          <p:nvPr/>
-        </p:nvSpPr>
-        <p:spPr>
-          <a:xfrm>
-            <a:off x="4850892" y="4169664"/>
+          <p:cNvPr id="49" name="Text 47"/>
+          <p:cNvSpPr/>
+          <p:nvPr/>
+        </p:nvSpPr>
+        <p:spPr>
+          <a:xfrm>
+            <a:off x="4447032" y="4169664"/>
             <a:ext cx="685800" cy="475488"/>
           </a:xfrm>
           <a:prstGeom prst="rect">
@@ -34180,13 +34792,13 @@
       </p:sp>
       <p:sp>
         <p:nvSpPr>
-          <p:cNvPr id="47" name="Shape 45"/>
-          <p:cNvSpPr/>
-          <p:nvPr/>
-        </p:nvSpPr>
-        <p:spPr>
-          <a:xfrm>
-            <a:off x="5759577" y="4169664"/>
+          <p:cNvPr id="50" name="Shape 48"/>
+          <p:cNvSpPr/>
+          <p:nvPr/>
+        </p:nvSpPr>
+        <p:spPr>
+          <a:xfrm>
+            <a:off x="5254752" y="4169664"/>
             <a:ext cx="685800" cy="475488"/>
           </a:xfrm>
           <a:prstGeom prst="rect">
@@ -34207,13 +34819,13 @@
       </p:sp>
       <p:sp>
         <p:nvSpPr>
-          <p:cNvPr id="48" name="Text 46"/>
-          <p:cNvSpPr/>
-          <p:nvPr/>
-        </p:nvSpPr>
-        <p:spPr>
-          <a:xfrm>
-            <a:off x="5759577" y="4169664"/>
+          <p:cNvPr id="51" name="Text 49"/>
+          <p:cNvSpPr/>
+          <p:nvPr/>
+        </p:nvSpPr>
+        <p:spPr>
+          <a:xfrm>
+            <a:off x="5254752" y="4169664"/>
             <a:ext cx="685800" cy="475488"/>
           </a:xfrm>
           <a:prstGeom prst="rect">
@@ -34246,13 +34858,13 @@
       </p:sp>
       <p:sp>
         <p:nvSpPr>
-          <p:cNvPr id="49" name="Shape 47"/>
-          <p:cNvSpPr/>
-          <p:nvPr/>
-        </p:nvSpPr>
-        <p:spPr>
-          <a:xfrm>
-            <a:off x="6668262" y="4169664"/>
+          <p:cNvPr id="52" name="Shape 50"/>
+          <p:cNvSpPr/>
+          <p:nvPr/>
+        </p:nvSpPr>
+        <p:spPr>
+          <a:xfrm>
+            <a:off x="6062472" y="4169664"/>
             <a:ext cx="685800" cy="475488"/>
           </a:xfrm>
           <a:prstGeom prst="rect">
@@ -34273,13 +34885,13 @@
       </p:sp>
       <p:sp>
         <p:nvSpPr>
-          <p:cNvPr id="50" name="Text 48"/>
-          <p:cNvSpPr/>
-          <p:nvPr/>
-        </p:nvSpPr>
-        <p:spPr>
-          <a:xfrm>
-            <a:off x="6668262" y="4169664"/>
+          <p:cNvPr id="53" name="Text 51"/>
+          <p:cNvSpPr/>
+          <p:nvPr/>
+        </p:nvSpPr>
+        <p:spPr>
+          <a:xfrm>
+            <a:off x="6062472" y="4169664"/>
             <a:ext cx="685800" cy="475488"/>
           </a:xfrm>
           <a:prstGeom prst="rect">
@@ -34312,13 +34924,13 @@
       </p:sp>
       <p:sp>
         <p:nvSpPr>
-          <p:cNvPr id="51" name="Shape 49"/>
-          <p:cNvSpPr/>
-          <p:nvPr/>
-        </p:nvSpPr>
-        <p:spPr>
-          <a:xfrm>
-            <a:off x="7576947" y="4169664"/>
+          <p:cNvPr id="54" name="Shape 52"/>
+          <p:cNvSpPr/>
+          <p:nvPr/>
+        </p:nvSpPr>
+        <p:spPr>
+          <a:xfrm>
+            <a:off x="6870192" y="4169664"/>
             <a:ext cx="685800" cy="475488"/>
           </a:xfrm>
           <a:prstGeom prst="rect">
@@ -34339,13 +34951,13 @@
       </p:sp>
       <p:sp>
         <p:nvSpPr>
-          <p:cNvPr id="52" name="Text 50"/>
-          <p:cNvSpPr/>
-          <p:nvPr/>
-        </p:nvSpPr>
-        <p:spPr>
-          <a:xfrm>
-            <a:off x="7576947" y="4169664"/>
+          <p:cNvPr id="55" name="Text 53"/>
+          <p:cNvSpPr/>
+          <p:nvPr/>
+        </p:nvSpPr>
+        <p:spPr>
+          <a:xfrm>
+            <a:off x="6870192" y="4169664"/>
             <a:ext cx="685800" cy="475488"/>
           </a:xfrm>
           <a:prstGeom prst="rect">
@@ -34370,7 +34982,73 @@
                 <a:ea typeface="Trebuchet MS" pitchFamily="34" charset="-122"/>
                 <a:cs typeface="Trebuchet MS" pitchFamily="34" charset="-120"/>
               </a:rPr>
-              <a:t>le</a:t>
+              <a:t>l</a:t>
+            </a:r>
+            <a:endParaRPr lang="en-US" sz="900" dirty="0"/>
+          </a:p>
+        </p:txBody>
+      </p:sp>
+      <p:sp>
+        <p:nvSpPr>
+          <p:cNvPr id="56" name="Shape 54"/>
+          <p:cNvSpPr/>
+          <p:nvPr/>
+        </p:nvSpPr>
+        <p:spPr>
+          <a:xfrm>
+            <a:off x="7677912" y="4169664"/>
+            <a:ext cx="685800" cy="475488"/>
+          </a:xfrm>
+          <a:prstGeom prst="rect">
+            <a:avLst>
+              <a:gd name="adj" fmla="val 7692"/>
+            </a:avLst>
+          </a:prstGeom>
+          <a:solidFill>
+            <a:srgbClr val="FFFFFF"/>
+          </a:solidFill>
+          <a:ln w="12700">
+            <a:solidFill>
+              <a:srgbClr val="DB2777"/>
+            </a:solidFill>
+            <a:prstDash val="solid"/>
+          </a:ln>
+        </p:spPr>
+      </p:sp>
+      <p:sp>
+        <p:nvSpPr>
+          <p:cNvPr id="57" name="Text 55"/>
+          <p:cNvSpPr/>
+          <p:nvPr/>
+        </p:nvSpPr>
+        <p:spPr>
+          <a:xfrm>
+            <a:off x="7677912" y="4169664"/>
+            <a:ext cx="685800" cy="475488"/>
+          </a:xfrm>
+          <a:prstGeom prst="rect">
+            <a:avLst/>
+          </a:prstGeom>
+          <a:noFill/>
+          <a:ln/>
+        </p:spPr>
+        <p:txBody>
+          <a:bodyPr wrap="square" lIns="0" tIns="0" rIns="0" bIns="0" rtlCol="0" anchor="ctr"/>
+          <a:lstStyle/>
+          <a:p>
+            <a:pPr algn="ctr" indent="0" marL="0">
+              <a:buNone/>
+            </a:pPr>
+            <a:r>
+              <a:rPr lang="en-US" sz="900" b="1" dirty="0">
+                <a:solidFill>
+                  <a:srgbClr val="9D174D"/>
+                </a:solidFill>
+                <a:latin typeface="Trebuchet MS" pitchFamily="34" charset="0"/>
+                <a:ea typeface="Trebuchet MS" pitchFamily="34" charset="-122"/>
+                <a:cs typeface="Trebuchet MS" pitchFamily="34" charset="-120"/>
+              </a:rPr>
+              <a:t>y</a:t>
             </a:r>
             <a:endParaRPr lang="en-US" sz="900" dirty="0"/>
           </a:p>
@@ -36260,7 +36938,7 @@
                 <a:ea typeface="Trebuchet MS" pitchFamily="34" charset="-122"/>
                 <a:cs typeface="Trebuchet MS" pitchFamily="34" charset="-120"/>
               </a:rPr>
-              <a:t>-ment</a:t>
+              <a:t>-able</a:t>
             </a:r>
             <a:endParaRPr lang="en-US" sz="1300" dirty="0"/>
           </a:p>
@@ -36413,7 +37091,7 @@
                 <a:ea typeface="Trebuchet MS" pitchFamily="34" charset="-122"/>
                 <a:cs typeface="Trebuchet MS" pitchFamily="34" charset="-120"/>
               </a:rPr>
-              <a:t>-able</a:t>
+              <a:t>-ment</a:t>
             </a:r>
             <a:endParaRPr lang="en-US" sz="1300" dirty="0"/>
           </a:p>
@@ -36566,7 +37244,7 @@
                 <a:ea typeface="Trebuchet MS" pitchFamily="34" charset="-122"/>
                 <a:cs typeface="Trebuchet MS" pitchFamily="34" charset="-120"/>
               </a:rPr>
-              <a:t>-ably</a:t>
+              <a:t>-ing</a:t>
             </a:r>
             <a:endParaRPr lang="en-US" sz="1300" dirty="0"/>
           </a:p>
@@ -36630,7 +37308,7 @@
                 <a:ea typeface="Trebuchet MS" pitchFamily="34" charset="-122"/>
                 <a:cs typeface="Trebuchet MS" pitchFamily="34" charset="-120"/>
               </a:rPr>
-              <a:t>un-</a:t>
+              <a:t>counter-</a:t>
             </a:r>
             <a:endParaRPr lang="en-US" sz="1300" dirty="0"/>
           </a:p>
@@ -36719,7 +37397,7 @@
                 <a:ea typeface="Trebuchet MS" pitchFamily="34" charset="-122"/>
                 <a:cs typeface="Trebuchet MS" pitchFamily="34" charset="-120"/>
               </a:rPr>
-              <a:t>-ing</a:t>
+              <a:t>-ed</a:t>
             </a:r>
             <a:endParaRPr lang="en-US" sz="1300" dirty="0"/>
           </a:p>
@@ -36783,7 +37461,7 @@
                 <a:ea typeface="Trebuchet MS" pitchFamily="34" charset="-122"/>
                 <a:cs typeface="Trebuchet MS" pitchFamily="34" charset="-120"/>
               </a:rPr>
-              <a:t>over-</a:t>
+              <a:t>non-</a:t>
             </a:r>
             <a:endParaRPr lang="en-US" sz="1300" dirty="0"/>
           </a:p>
@@ -36872,7 +37550,7 @@
                 <a:ea typeface="Trebuchet MS" pitchFamily="34" charset="-122"/>
                 <a:cs typeface="Trebuchet MS" pitchFamily="34" charset="-120"/>
               </a:rPr>
-              <a:t>-ed</a:t>
+              <a:t>-ably</a:t>
             </a:r>
             <a:endParaRPr lang="en-US" sz="1300" dirty="0"/>
           </a:p>
@@ -38627,7 +39305,7 @@
                 <a:ea typeface="Calibri" pitchFamily="34" charset="-122"/>
                 <a:cs typeface="Calibri" pitchFamily="34" charset="-120"/>
               </a:rPr>
-              <a:t>1.  The word 'disagreement' contains the root 'agree'.</a:t>
+              <a:t>1.  The word 'agreeable' means something is pleasant or easy to accept.</a:t>
             </a:r>
             <a:endParaRPr lang="en-US" sz="1300" dirty="0"/>
           </a:p>
@@ -38766,7 +39444,7 @@
                 <a:ea typeface="Calibri" pitchFamily="34" charset="-122"/>
                 <a:cs typeface="Calibri" pitchFamily="34" charset="-120"/>
               </a:rPr>
-              <a:t>2.  The root 'agree' comes from a Greek word.</a:t>
+              <a:t>2.  The prefix 'dis-' in 'disagree' means the same or together.</a:t>
             </a:r>
             <a:endParaRPr lang="en-US" sz="1300" dirty="0"/>
           </a:p>
@@ -38905,7 +39583,7 @@
                 <a:ea typeface="Calibri" pitchFamily="34" charset="-122"/>
                 <a:cs typeface="Calibri" pitchFamily="34" charset="-120"/>
               </a:rPr>
-              <a:t>3.  Adding the prefix 'dis' to 'agree' gives the word an opposite meaning.</a:t>
+              <a:t>3.  The root 'agree' comes from a Greek word meaning to speak.</a:t>
             </a:r>
             <a:endParaRPr lang="en-US" sz="1300" dirty="0"/>
           </a:p>
@@ -38928,11 +39606,11 @@
             </a:avLst>
           </a:prstGeom>
           <a:solidFill>
-            <a:srgbClr val="DCFCE7"/>
-          </a:solidFill>
-          <a:ln w="12700">
-            <a:solidFill>
-              <a:srgbClr val="16A34A"/>
+            <a:srgbClr val="FEE2E2"/>
+          </a:solidFill>
+          <a:ln w="12700">
+            <a:solidFill>
+              <a:srgbClr val="DC2626"/>
             </a:solidFill>
             <a:prstDash val="solid"/>
           </a:ln>
@@ -38965,13 +39643,13 @@
             <a:r>
               <a:rPr lang="en-US" sz="1100" b="1" dirty="0">
                 <a:solidFill>
-                  <a:srgbClr val="16A34A"/>
+                  <a:srgbClr val="DC2626"/>
                 </a:solidFill>
                 <a:latin typeface="Trebuchet MS" pitchFamily="34" charset="0"/>
                 <a:ea typeface="Trebuchet MS" pitchFamily="34" charset="-122"/>
                 <a:cs typeface="Trebuchet MS" pitchFamily="34" charset="-120"/>
               </a:rPr>
-              <a:t>TRUE</a:t>
+              <a:t>FALSE</a:t>
             </a:r>
             <a:endParaRPr lang="en-US" sz="1100" dirty="0"/>
           </a:p>
@@ -39044,7 +39722,7 @@
                 <a:ea typeface="Calibri" pitchFamily="34" charset="-122"/>
                 <a:cs typeface="Calibri" pitchFamily="34" charset="-120"/>
               </a:rPr>
-              <a:t>4.  The suffix '-ment' in 'agreement' turns the verb into a noun.</a:t>
+              <a:t>4.  The word 'disagree' contains the root 'agree' with a prefix added to it.</a:t>
             </a:r>
             <a:endParaRPr lang="en-US" sz="1300" dirty="0"/>
           </a:p>
@@ -39183,7 +39861,7 @@
                 <a:ea typeface="Calibri" pitchFamily="34" charset="-122"/>
                 <a:cs typeface="Calibri" pitchFamily="34" charset="-120"/>
               </a:rPr>
-              <a:t>5.  The word 'agreeable' means someone who is difficult to get along with.</a:t>
+              <a:t>5.  Adding the suffix '-ment' to 'agree' makes the word 'agreement', which is a noun.</a:t>
             </a:r>
             <a:endParaRPr lang="en-US" sz="1300" dirty="0"/>
           </a:p>
@@ -39206,11 +39884,11 @@
             </a:avLst>
           </a:prstGeom>
           <a:solidFill>
-            <a:srgbClr val="FEE2E2"/>
-          </a:solidFill>
-          <a:ln w="12700">
-            <a:solidFill>
-              <a:srgbClr val="DC2626"/>
+            <a:srgbClr val="DCFCE7"/>
+          </a:solidFill>
+          <a:ln w="12700">
+            <a:solidFill>
+              <a:srgbClr val="16A34A"/>
             </a:solidFill>
             <a:prstDash val="solid"/>
           </a:ln>
@@ -39243,13 +39921,13 @@
             <a:r>
               <a:rPr lang="en-US" sz="1100" b="1" dirty="0">
                 <a:solidFill>
-                  <a:srgbClr val="DC2626"/>
+                  <a:srgbClr val="16A34A"/>
                 </a:solidFill>
                 <a:latin typeface="Trebuchet MS" pitchFamily="34" charset="0"/>
                 <a:ea typeface="Trebuchet MS" pitchFamily="34" charset="-122"/>
                 <a:cs typeface="Trebuchet MS" pitchFamily="34" charset="-120"/>
               </a:rPr>
-              <a:t>FALSE</a:t>
+              <a:t>TRUE</a:t>
             </a:r>
             <a:endParaRPr lang="en-US" sz="1100" dirty="0"/>
           </a:p>
@@ -40939,7 +41617,7 @@
                 <a:ea typeface="Trebuchet MS" pitchFamily="34" charset="-122"/>
                 <a:cs typeface="Trebuchet MS" pitchFamily="34" charset="-120"/>
               </a:rPr>
-              <a:t>-ment</a:t>
+              <a:t>-able</a:t>
             </a:r>
             <a:endParaRPr lang="en-US" sz="1300" dirty="0"/>
           </a:p>
@@ -41092,7 +41770,7 @@
                 <a:ea typeface="Trebuchet MS" pitchFamily="34" charset="-122"/>
                 <a:cs typeface="Trebuchet MS" pitchFamily="34" charset="-120"/>
               </a:rPr>
-              <a:t>-able</a:t>
+              <a:t>-ment</a:t>
             </a:r>
             <a:endParaRPr lang="en-US" sz="1300" dirty="0"/>
           </a:p>
@@ -41245,7 +41923,7 @@
                 <a:ea typeface="Trebuchet MS" pitchFamily="34" charset="-122"/>
                 <a:cs typeface="Trebuchet MS" pitchFamily="34" charset="-120"/>
               </a:rPr>
-              <a:t>-ably</a:t>
+              <a:t>-ing</a:t>
             </a:r>
             <a:endParaRPr lang="en-US" sz="1300" dirty="0"/>
           </a:p>
@@ -41309,7 +41987,7 @@
                 <a:ea typeface="Trebuchet MS" pitchFamily="34" charset="-122"/>
                 <a:cs typeface="Trebuchet MS" pitchFamily="34" charset="-120"/>
               </a:rPr>
-              <a:t>un-</a:t>
+              <a:t>counter-</a:t>
             </a:r>
             <a:endParaRPr lang="en-US" sz="1300" dirty="0"/>
           </a:p>
@@ -41398,7 +42076,7 @@
                 <a:ea typeface="Trebuchet MS" pitchFamily="34" charset="-122"/>
                 <a:cs typeface="Trebuchet MS" pitchFamily="34" charset="-120"/>
               </a:rPr>
-              <a:t>-ing</a:t>
+              <a:t>-ed</a:t>
             </a:r>
             <a:endParaRPr lang="en-US" sz="1300" dirty="0"/>
           </a:p>
@@ -41462,7 +42140,7 @@
                 <a:ea typeface="Trebuchet MS" pitchFamily="34" charset="-122"/>
                 <a:cs typeface="Trebuchet MS" pitchFamily="34" charset="-120"/>
               </a:rPr>
-              <a:t>over-</a:t>
+              <a:t>non-</a:t>
             </a:r>
             <a:endParaRPr lang="en-US" sz="1300" dirty="0"/>
           </a:p>
@@ -41551,7 +42229,7 @@
                 <a:ea typeface="Trebuchet MS" pitchFamily="34" charset="-122"/>
                 <a:cs typeface="Trebuchet MS" pitchFamily="34" charset="-120"/>
               </a:rPr>
-              <a:t>-ed</a:t>
+              <a:t>-ably</a:t>
             </a:r>
             <a:endParaRPr lang="en-US" sz="1300" dirty="0"/>
           </a:p>
@@ -41887,7 +42565,7 @@
                 <a:ea typeface="Trebuchet MS" pitchFamily="34" charset="-122"/>
                 <a:cs typeface="Trebuchet MS" pitchFamily="34" charset="-120"/>
               </a:rPr>
-              <a:t>-ment</a:t>
+              <a:t>-able</a:t>
             </a:r>
             <a:endParaRPr lang="en-US" sz="1300" dirty="0"/>
           </a:p>
@@ -42462,7 +43140,7 @@
                 <a:ea typeface="Calibri" pitchFamily="34" charset="-122"/>
                 <a:cs typeface="Calibri" pitchFamily="34" charset="-120"/>
               </a:rPr>
-              <a:t>Something or someone that is pleasant and easy to get along with.</a:t>
+              <a:t>Pleasant, easy to get along with, or willing to go along with something.</a:t>
             </a:r>
             <a:endParaRPr lang="en-US" sz="1200" dirty="0"/>
           </a:p>
@@ -42601,7 +43279,7 @@
                 <a:ea typeface="Calibri" pitchFamily="34" charset="-122"/>
                 <a:cs typeface="Calibri" pitchFamily="34" charset="-120"/>
               </a:rPr>
-              <a:t>When two or more people share the same opinion or make a deal together.</a:t>
+              <a:t>A decision or plan that people have accepted together.</a:t>
             </a:r>
             <a:endParaRPr lang="en-US" sz="1200" dirty="0"/>
           </a:p>
@@ -42879,7 +43557,7 @@
                 <a:ea typeface="Calibri" pitchFamily="34" charset="-122"/>
                 <a:cs typeface="Calibri" pitchFamily="34" charset="-120"/>
               </a:rPr>
-              <a:t>Currently sharing the same opinion or saying yes to something.</a:t>
+              <a:t>Currently sharing the same opinion as someone else.</a:t>
             </a:r>
             <a:endParaRPr lang="en-US" sz="1200" dirty="0"/>
           </a:p>
@@ -43018,7 +43696,7 @@
                 <a:ea typeface="Calibri" pitchFamily="34" charset="-122"/>
                 <a:cs typeface="Calibri" pitchFamily="34" charset="-120"/>
               </a:rPr>
-              <a:t>To have a different opinion from someone else or to say no to something.</a:t>
+              <a:t>To have a different opinion from someone else.</a:t>
             </a:r>
             <a:endParaRPr lang="en-US" sz="1200" dirty="0"/>
           </a:p>
@@ -43157,7 +43835,7 @@
                 <a:ea typeface="Calibri" pitchFamily="34" charset="-122"/>
                 <a:cs typeface="Calibri" pitchFamily="34" charset="-120"/>
               </a:rPr>
-              <a:t>To have the same opinion as someone else or to say yes to something.</a:t>
+              <a:t>To think the same as someone else or say yes to something.</a:t>
             </a:r>
             <a:endParaRPr lang="en-US" sz="1200" dirty="0"/>
           </a:p>
@@ -43296,7 +43974,7 @@
                 <a:ea typeface="Calibri" pitchFamily="34" charset="-122"/>
                 <a:cs typeface="Calibri" pitchFamily="34" charset="-120"/>
               </a:rPr>
-              <a:t>When everyone has already said yes or had the same opinion about something.</a:t>
+              <a:t>When people already came to the same decision about something.</a:t>
             </a:r>
             <a:endParaRPr lang="en-US" sz="1200" dirty="0"/>
           </a:p>
@@ -43791,7 +44469,7 @@
                 <a:ea typeface="Calibri" pitchFamily="34" charset="-122"/>
                 <a:cs typeface="Calibri" pitchFamily="34" charset="-120"/>
               </a:rPr>
-              <a:t>The two friends reached an agreement about which game to play at lunchtime.</a:t>
+              <a:t>The two friends were happy to reach an agreement about which game to play at lunchtime.</a:t>
             </a:r>
             <a:endParaRPr lang="en-US" sz="1500" dirty="0"/>
           </a:p>
@@ -43955,7 +44633,7 @@
                 <a:ea typeface="Calibri" pitchFamily="34" charset="-122"/>
                 <a:cs typeface="Calibri" pitchFamily="34" charset="-120"/>
               </a:rPr>
-              <a:t>Mia was agreeable when her teacher asked her to help the new student settle in.</a:t>
+              <a:t>My teacher said it is important to disagree politely and listen to other people's ideas.</a:t>
             </a:r>
             <a:endParaRPr lang="en-US" sz="1500" dirty="0"/>
           </a:p>
@@ -44119,7 +44797,7 @@
                 <a:ea typeface="Calibri" pitchFamily="34" charset="-122"/>
                 <a:cs typeface="Calibri" pitchFamily="34" charset="-120"/>
               </a:rPr>
-              <a:t>The class started to disagree about whether the character in the story made the right choice.</a:t>
+              <a:t>Everyone nodded because they found the new classroom rules quite agreeable.</a:t>
             </a:r>
             <a:endParaRPr lang="en-US" sz="1500" dirty="0"/>
           </a:p>
